--- a/ai-code-assistant-course.pptx
+++ b/ai-code-assistant-course.pptx
@@ -5,7 +5,7 @@
     <p:sldMasterId id="2147483648" r:id="rId1"/>
   </p:sldMasterIdLst>
   <p:notesMasterIdLst>
-    <p:notesMasterId r:id="rId13"/>
+    <p:notesMasterId r:id="rId12"/>
   </p:notesMasterIdLst>
   <p:sldIdLst>
     <p:sldId id="256" r:id="rId2"/>
@@ -14,11 +14,10 @@
     <p:sldId id="259" r:id="rId5"/>
     <p:sldId id="260" r:id="rId6"/>
     <p:sldId id="261" r:id="rId7"/>
-    <p:sldId id="262" r:id="rId8"/>
-    <p:sldId id="263" r:id="rId9"/>
-    <p:sldId id="264" r:id="rId10"/>
-    <p:sldId id="265" r:id="rId11"/>
-    <p:sldId id="266" r:id="rId12"/>
+    <p:sldId id="263" r:id="rId8"/>
+    <p:sldId id="264" r:id="rId9"/>
+    <p:sldId id="265" r:id="rId10"/>
+    <p:sldId id="266" r:id="rId11"/>
   </p:sldIdLst>
   <p:sldSz cx="9144000" cy="5143500" type="screen16x9"/>
   <p:notesSz cx="5143500" cy="9144000"/>
@@ -397,90 +396,6 @@
             <a:fld id="{F7021451-1387-4CA6-816F-3879F97B5CBC}" type="slidenum">
               <a:rPr lang="en-US"/>
               <a:t>10</a:t>
-            </a:fld>
-            <a:endParaRPr lang="en-US"/>
-          </a:p>
-        </p:txBody>
-      </p:sp>
-    </p:spTree>
-    <p:extLst>
-      <p:ext uri="{BB962C8B-B14F-4D97-AF65-F5344CB8AC3E}">
-        <p14:creationId xmlns:p14="http://schemas.microsoft.com/office/powerpoint/2010/main" val="1024086991"/>
-      </p:ext>
-    </p:extLst>
-  </p:cSld>
-  <p:clrMapOvr>
-    <a:masterClrMapping/>
-  </p:clrMapOvr>
-</p:notes>
-</file>
-
-<file path=ppt/notesSlides/notesSlide11.xml><?xml version="1.0" encoding="utf-8"?>
-<p:notes xmlns:a="http://schemas.openxmlformats.org/drawingml/2006/main" xmlns:r="http://schemas.openxmlformats.org/officeDocument/2006/relationships" xmlns:p="http://schemas.openxmlformats.org/presentationml/2006/main">
-  <p:cSld>
-    <p:spTree>
-      <p:nvGrpSpPr>
-        <p:cNvPr id="1" name=""/>
-        <p:cNvGrpSpPr/>
-        <p:nvPr/>
-      </p:nvGrpSpPr>
-      <p:grpSpPr>
-        <a:xfrm>
-          <a:off x="0" y="0"/>
-          <a:ext cx="0" cy="0"/>
-          <a:chOff x="0" y="0"/>
-          <a:chExt cx="0" cy="0"/>
-        </a:xfrm>
-      </p:grpSpPr>
-      <p:sp>
-        <p:nvSpPr>
-          <p:cNvPr id="2" name="Slide Image Placeholder 1"/>
-          <p:cNvSpPr>
-            <a:spLocks noGrp="1" noRot="1" noChangeAspect="1"/>
-          </p:cNvSpPr>
-          <p:nvPr>
-            <p:ph type="sldImg"/>
-          </p:nvPr>
-        </p:nvSpPr>
-        <p:spPr/>
-      </p:sp>
-      <p:sp>
-        <p:nvSpPr>
-          <p:cNvPr id="3" name="Notes Placeholder 2"/>
-          <p:cNvSpPr>
-            <a:spLocks noGrp="1"/>
-          </p:cNvSpPr>
-          <p:nvPr>
-            <p:ph type="body" idx="1"/>
-          </p:nvPr>
-        </p:nvSpPr>
-        <p:spPr/>
-        <p:txBody>
-          <a:bodyPr/>
-          <a:lstStyle/>
-          <a:p>
-            <a:endParaRPr lang="en-US" dirty="0"/>
-          </a:p>
-        </p:txBody>
-      </p:sp>
-      <p:sp>
-        <p:nvSpPr>
-          <p:cNvPr id="4" name="Slide Number Placeholder 3"/>
-          <p:cNvSpPr>
-            <a:spLocks noGrp="1"/>
-          </p:cNvSpPr>
-          <p:nvPr>
-            <p:ph type="sldNum" sz="quarter" idx="10"/>
-          </p:nvPr>
-        </p:nvSpPr>
-        <p:spPr/>
-        <p:txBody>
-          <a:bodyPr/>
-          <a:lstStyle/>
-          <a:p>
-            <a:fld id="{F7021451-1387-4CA6-816F-3879F97B5CBC}" type="slidenum">
-              <a:rPr lang="en-US"/>
-              <a:t>11</a:t>
             </a:fld>
             <a:endParaRPr lang="en-US"/>
           </a:p>
@@ -1608,48 +1523,6 @@
       </p:sp>
       <p:sp>
         <p:nvSpPr>
-          <p:cNvPr id="5" name="Text 3"/>
-          <p:cNvSpPr/>
-          <p:nvPr/>
-        </p:nvSpPr>
-        <p:spPr>
-          <a:xfrm>
-            <a:off x="507950" y="863352"/>
-            <a:ext cx="6255871" cy="266700"/>
-          </a:xfrm>
-          <a:prstGeom prst="rect">
-            <a:avLst/>
-          </a:prstGeom>
-          <a:noFill/>
-          <a:ln/>
-        </p:spPr>
-        <p:txBody>
-          <a:bodyPr wrap="square" lIns="0" tIns="0" rIns="0" bIns="0" rtlCol="0" anchor="t"/>
-          <a:lstStyle/>
-          <a:p>
-            <a:pPr marL="0" indent="0" algn="l">
-              <a:spcAft>
-                <a:spcPts val="3000"/>
-              </a:spcAft>
-              <a:buNone/>
-            </a:pPr>
-            <a:r>
-              <a:rPr lang="en-US" sz="1800" b="1" dirty="0">
-                <a:solidFill>
-                  <a:srgbClr val="B165FB"/>
-                </a:solidFill>
-                <a:latin typeface="Arial" pitchFamily="34" charset="0"/>
-                <a:ea typeface="Arial" pitchFamily="34" charset="-122"/>
-                <a:cs typeface="Arial" pitchFamily="34" charset="-120"/>
-              </a:rPr>
-              <a:t>ONLINE COURSE</a:t>
-            </a:r>
-            <a:endParaRPr lang="en-US" sz="1800" dirty="0"/>
-          </a:p>
-        </p:txBody>
-      </p:sp>
-      <p:sp>
-        <p:nvSpPr>
           <p:cNvPr id="6" name="Text 4"/>
           <p:cNvSpPr/>
           <p:nvPr/>
@@ -1710,7 +1583,7 @@
                 <a:ea typeface="Arial" pitchFamily="34" charset="-122"/>
                 <a:cs typeface="Arial" pitchFamily="34" charset="-120"/>
               </a:rPr>
-              <a:t>with Deep Agent Architecture</a:t>
+              <a:t>with Multi-Agents Architecture</a:t>
             </a:r>
             <a:endParaRPr lang="en-US" sz="3400" dirty="0"/>
           </a:p>
@@ -1755,7 +1628,7 @@
                 <a:ea typeface="Arial" pitchFamily="34" charset="-122"/>
                 <a:cs typeface="Arial" pitchFamily="34" charset="-120"/>
               </a:rPr>
-              <a:t>Learn how to build a multi-agent system where an orchestrator coordinates specialized subagents to tackle complex software engineering tasks through strategic delegation, verification, and shared knowledge.</a:t>
+              <a:t>Learn how to build a multi-agent system where an orchestrator coordinates specialized subagents to tackle complex software engineering tasks through strategic delegation.</a:t>
             </a:r>
             <a:endParaRPr lang="en-US" sz="1300" dirty="0"/>
           </a:p>
@@ -2000,8 +1873,8 @@
         </p:nvSpPr>
         <p:spPr>
           <a:xfrm>
-            <a:off x="3975646" y="4026247"/>
-            <a:ext cx="711398" cy="253901"/>
+            <a:off x="3975645" y="4026247"/>
+            <a:ext cx="995043" cy="253901"/>
           </a:xfrm>
           <a:prstGeom prst="roundRect">
             <a:avLst>
@@ -2038,8 +1911,8 @@
         </p:nvSpPr>
         <p:spPr>
           <a:xfrm>
-            <a:off x="4112121" y="4086523"/>
-            <a:ext cx="447217" cy="133350"/>
+            <a:off x="4112120" y="4086523"/>
+            <a:ext cx="858569" cy="133350"/>
           </a:xfrm>
           <a:prstGeom prst="rect">
             <a:avLst/>
@@ -2063,7 +1936,7 @@
                 <a:ea typeface="Arial" pitchFamily="34" charset="-122"/>
                 <a:cs typeface="Arial" pitchFamily="34" charset="-120"/>
               </a:rPr>
-              <a:t>Pydantic</a:t>
+              <a:t>AI engineering</a:t>
             </a:r>
             <a:endParaRPr lang="en-US" sz="900" dirty="0"/>
           </a:p>
@@ -2078,1281 +1951,6 @@
 </file>
 
 <file path=ppt/slides/slide10.xml><?xml version="1.0" encoding="utf-8"?>
-<p:sld xmlns:a="http://schemas.openxmlformats.org/drawingml/2006/main" xmlns:r="http://schemas.openxmlformats.org/officeDocument/2006/relationships" xmlns:p="http://schemas.openxmlformats.org/presentationml/2006/main">
-  <p:cSld name="Slide 10">
-    <p:bg>
-      <p:bgPr>
-        <a:solidFill>
-          <a:srgbClr val="181B24"/>
-        </a:solidFill>
-        <a:effectLst/>
-      </p:bgPr>
-    </p:bg>
-    <p:spTree>
-      <p:nvGrpSpPr>
-        <p:cNvPr id="1" name=""/>
-        <p:cNvGrpSpPr/>
-        <p:nvPr/>
-      </p:nvGrpSpPr>
-      <p:grpSpPr>
-        <a:xfrm>
-          <a:off x="0" y="0"/>
-          <a:ext cx="0" cy="0"/>
-          <a:chOff x="0" y="0"/>
-          <a:chExt cx="0" cy="0"/>
-        </a:xfrm>
-      </p:grpSpPr>
-      <p:sp>
-        <p:nvSpPr>
-          <p:cNvPr id="2" name="Text 0"/>
-          <p:cNvSpPr/>
-          <p:nvPr/>
-        </p:nvSpPr>
-        <p:spPr>
-          <a:xfrm>
-            <a:off x="0" y="0"/>
-            <a:ext cx="9144000" cy="50750"/>
-          </a:xfrm>
-          <a:prstGeom prst="rect">
-            <a:avLst/>
-          </a:prstGeom>
-          <a:solidFill>
-            <a:srgbClr val="B165FB"/>
-          </a:solidFill>
-          <a:ln/>
-        </p:spPr>
-        <p:txBody>
-          <a:bodyPr wrap="square" rtlCol="0" anchor="ctr"/>
-          <a:lstStyle/>
-          <a:p>
-            <a:pPr marL="0" indent="0">
-              <a:buNone/>
-            </a:pPr>
-            <a:endParaRPr lang="en-US" dirty="0"/>
-          </a:p>
-        </p:txBody>
-      </p:sp>
-      <p:sp>
-        <p:nvSpPr>
-          <p:cNvPr id="3" name="Text 1"/>
-          <p:cNvSpPr/>
-          <p:nvPr/>
-        </p:nvSpPr>
-        <p:spPr>
-          <a:xfrm>
-            <a:off x="507950" y="330101"/>
-            <a:ext cx="8290509" cy="352425"/>
-          </a:xfrm>
-          <a:prstGeom prst="rect">
-            <a:avLst/>
-          </a:prstGeom>
-          <a:noFill/>
-          <a:ln/>
-        </p:spPr>
-        <p:txBody>
-          <a:bodyPr wrap="square" lIns="0" tIns="0" rIns="0" bIns="0" rtlCol="0" anchor="t"/>
-          <a:lstStyle/>
-          <a:p>
-            <a:pPr marL="0" indent="0" algn="l">
-              <a:spcAft>
-                <a:spcPts val="400"/>
-              </a:spcAft>
-              <a:buNone/>
-            </a:pPr>
-            <a:r>
-              <a:rPr lang="en-US" sz="2400" b="1" dirty="0">
-                <a:solidFill>
-                  <a:srgbClr val="B165FB"/>
-                </a:solidFill>
-                <a:latin typeface="Arial" pitchFamily="34" charset="0"/>
-                <a:ea typeface="Arial" pitchFamily="34" charset="-122"/>
-                <a:cs typeface="Arial" pitchFamily="34" charset="-120"/>
-              </a:rPr>
-              <a:t>Key Design Decisions</a:t>
-            </a:r>
-            <a:endParaRPr lang="en-US" sz="2400" dirty="0"/>
-          </a:p>
-        </p:txBody>
-      </p:sp>
-      <p:sp>
-        <p:nvSpPr>
-          <p:cNvPr id="4" name="Text 2"/>
-          <p:cNvSpPr/>
-          <p:nvPr/>
-        </p:nvSpPr>
-        <p:spPr>
-          <a:xfrm>
-            <a:off x="507950" y="733276"/>
-            <a:ext cx="762000" cy="38100"/>
-          </a:xfrm>
-          <a:prstGeom prst="rect">
-            <a:avLst/>
-          </a:prstGeom>
-          <a:solidFill>
-            <a:srgbClr val="40695B"/>
-          </a:solidFill>
-          <a:ln/>
-        </p:spPr>
-        <p:txBody>
-          <a:bodyPr wrap="square" rtlCol="0" anchor="ctr"/>
-          <a:lstStyle/>
-          <a:p>
-            <a:pPr marL="0" indent="0">
-              <a:buNone/>
-            </a:pPr>
-            <a:endParaRPr lang="en-US" dirty="0"/>
-          </a:p>
-        </p:txBody>
-      </p:sp>
-      <p:sp>
-        <p:nvSpPr>
-          <p:cNvPr id="5" name="Text 3"/>
-          <p:cNvSpPr/>
-          <p:nvPr/>
-        </p:nvSpPr>
-        <p:spPr>
-          <a:xfrm>
-            <a:off x="507950" y="898327"/>
-            <a:ext cx="2624733" cy="972889"/>
-          </a:xfrm>
-          <a:prstGeom prst="roundRect">
-            <a:avLst>
-              <a:gd name="adj" fmla="val 7832"/>
-            </a:avLst>
-          </a:prstGeom>
-          <a:solidFill>
-            <a:srgbClr val="FFFFFF">
-              <a:alpha val="3000"/>
-            </a:srgbClr>
-          </a:solidFill>
-          <a:ln w="9525">
-            <a:solidFill>
-              <a:srgbClr val="FFFFFF"/>
-            </a:solidFill>
-          </a:ln>
-        </p:spPr>
-        <p:txBody>
-          <a:bodyPr wrap="square" rtlCol="0" anchor="ctr"/>
-          <a:lstStyle/>
-          <a:p>
-            <a:pPr marL="0" indent="0">
-              <a:buNone/>
-            </a:pPr>
-            <a:endParaRPr lang="en-US" dirty="0"/>
-          </a:p>
-        </p:txBody>
-      </p:sp>
-      <p:sp>
-        <p:nvSpPr>
-          <p:cNvPr id="6" name="Text 4"/>
-          <p:cNvSpPr/>
-          <p:nvPr/>
-        </p:nvSpPr>
-        <p:spPr>
-          <a:xfrm>
-            <a:off x="669875" y="1034802"/>
-            <a:ext cx="228600" cy="228600"/>
-          </a:xfrm>
-          <a:prstGeom prst="roundRect">
-            <a:avLst>
-              <a:gd name="adj" fmla="val 22222"/>
-            </a:avLst>
-          </a:prstGeom>
-          <a:solidFill>
-            <a:srgbClr val="B165FB"/>
-          </a:solidFill>
-          <a:ln/>
-        </p:spPr>
-        <p:txBody>
-          <a:bodyPr wrap="square" rtlCol="0" anchor="ctr"/>
-          <a:lstStyle/>
-          <a:p>
-            <a:pPr marL="0" indent="0">
-              <a:buNone/>
-            </a:pPr>
-            <a:endParaRPr lang="en-US" dirty="0"/>
-          </a:p>
-        </p:txBody>
-      </p:sp>
-      <p:sp>
-        <p:nvSpPr>
-          <p:cNvPr id="7" name="Text 5"/>
-          <p:cNvSpPr/>
-          <p:nvPr/>
-        </p:nvSpPr>
-        <p:spPr>
-          <a:xfrm>
-            <a:off x="752326" y="1082427"/>
-            <a:ext cx="64972" cy="133350"/>
-          </a:xfrm>
-          <a:prstGeom prst="rect">
-            <a:avLst/>
-          </a:prstGeom>
-          <a:noFill/>
-          <a:ln/>
-        </p:spPr>
-        <p:txBody>
-          <a:bodyPr wrap="square" lIns="0" tIns="0" rIns="0" bIns="0" rtlCol="0" anchor="t"/>
-          <a:lstStyle/>
-          <a:p>
-            <a:pPr marL="0" indent="0" algn="l">
-              <a:buNone/>
-            </a:pPr>
-            <a:r>
-              <a:rPr lang="en-US" sz="900" b="1" dirty="0">
-                <a:solidFill>
-                  <a:srgbClr val="FFFFFF"/>
-                </a:solidFill>
-                <a:latin typeface="Arial" pitchFamily="34" charset="0"/>
-                <a:ea typeface="Arial" pitchFamily="34" charset="-122"/>
-                <a:cs typeface="Arial" pitchFamily="34" charset="-120"/>
-              </a:rPr>
-              <a:t>1</a:t>
-            </a:r>
-            <a:endParaRPr lang="en-US" sz="900" dirty="0"/>
-          </a:p>
-        </p:txBody>
-      </p:sp>
-      <p:sp>
-        <p:nvSpPr>
-          <p:cNvPr id="8" name="Text 6"/>
-          <p:cNvSpPr/>
-          <p:nvPr/>
-        </p:nvSpPr>
-        <p:spPr>
-          <a:xfrm>
-            <a:off x="974675" y="1072902"/>
-            <a:ext cx="1186657" cy="152400"/>
-          </a:xfrm>
-          <a:prstGeom prst="rect">
-            <a:avLst/>
-          </a:prstGeom>
-          <a:noFill/>
-          <a:ln/>
-        </p:spPr>
-        <p:txBody>
-          <a:bodyPr wrap="square" lIns="0" tIns="0" rIns="0" bIns="0" rtlCol="0" anchor="t"/>
-          <a:lstStyle/>
-          <a:p>
-            <a:pPr marL="0" indent="0" algn="l">
-              <a:buNone/>
-            </a:pPr>
-            <a:r>
-              <a:rPr lang="en-US" sz="1050" b="1" dirty="0">
-                <a:solidFill>
-                  <a:srgbClr val="FFFFFF"/>
-                </a:solidFill>
-                <a:latin typeface="Arial" pitchFamily="34" charset="0"/>
-                <a:ea typeface="Arial" pitchFamily="34" charset="-122"/>
-                <a:cs typeface="Arial" pitchFamily="34" charset="-120"/>
-              </a:rPr>
-              <a:t>Forced Delegation</a:t>
-            </a:r>
-            <a:endParaRPr lang="en-US" sz="1050" dirty="0"/>
-          </a:p>
-        </p:txBody>
-      </p:sp>
-      <p:sp>
-        <p:nvSpPr>
-          <p:cNvPr id="9" name="Text 7"/>
-          <p:cNvSpPr/>
-          <p:nvPr/>
-        </p:nvSpPr>
-        <p:spPr>
-          <a:xfrm>
-            <a:off x="669875" y="1314152"/>
-            <a:ext cx="2346900" cy="420588"/>
-          </a:xfrm>
-          <a:prstGeom prst="rect">
-            <a:avLst/>
-          </a:prstGeom>
-          <a:noFill/>
-          <a:ln/>
-        </p:spPr>
-        <p:txBody>
-          <a:bodyPr wrap="square" lIns="0" tIns="0" rIns="0" bIns="0" rtlCol="0" anchor="t"/>
-          <a:lstStyle/>
-          <a:p>
-            <a:pPr marL="0" indent="0" algn="l">
-              <a:lnSpc>
-                <a:spcPts val="1105"/>
-              </a:lnSpc>
-              <a:buNone/>
-            </a:pPr>
-            <a:r>
-              <a:rPr lang="en-US" sz="850" dirty="0">
-                <a:solidFill>
-                  <a:srgbClr val="AAAAAA"/>
-                </a:solidFill>
-                <a:latin typeface="Arial" pitchFamily="34" charset="0"/>
-                <a:ea typeface="Arial" pitchFamily="34" charset="-122"/>
-                <a:cs typeface="Arial" pitchFamily="34" charset="-120"/>
-              </a:rPr>
-              <a:t>Orchestrator has no code access, forcing proper task decomposition and strategic thinking over quick fixes.</a:t>
-            </a:r>
-            <a:endParaRPr lang="en-US" sz="850" dirty="0"/>
-          </a:p>
-        </p:txBody>
-      </p:sp>
-      <p:sp>
-        <p:nvSpPr>
-          <p:cNvPr id="10" name="Text 8"/>
-          <p:cNvSpPr/>
-          <p:nvPr/>
-        </p:nvSpPr>
-        <p:spPr>
-          <a:xfrm>
-            <a:off x="3259634" y="898327"/>
-            <a:ext cx="2624584" cy="972889"/>
-          </a:xfrm>
-          <a:prstGeom prst="roundRect">
-            <a:avLst>
-              <a:gd name="adj" fmla="val 7832"/>
-            </a:avLst>
-          </a:prstGeom>
-          <a:solidFill>
-            <a:srgbClr val="FFFFFF">
-              <a:alpha val="3000"/>
-            </a:srgbClr>
-          </a:solidFill>
-          <a:ln w="9525">
-            <a:solidFill>
-              <a:srgbClr val="FFFFFF"/>
-            </a:solidFill>
-          </a:ln>
-        </p:spPr>
-        <p:txBody>
-          <a:bodyPr wrap="square" rtlCol="0" anchor="ctr"/>
-          <a:lstStyle/>
-          <a:p>
-            <a:pPr marL="0" indent="0">
-              <a:buNone/>
-            </a:pPr>
-            <a:endParaRPr lang="en-US" dirty="0"/>
-          </a:p>
-        </p:txBody>
-      </p:sp>
-      <p:sp>
-        <p:nvSpPr>
-          <p:cNvPr id="11" name="Text 9"/>
-          <p:cNvSpPr/>
-          <p:nvPr/>
-        </p:nvSpPr>
-        <p:spPr>
-          <a:xfrm>
-            <a:off x="3421559" y="1034802"/>
-            <a:ext cx="228600" cy="228600"/>
-          </a:xfrm>
-          <a:prstGeom prst="roundRect">
-            <a:avLst>
-              <a:gd name="adj" fmla="val 22222"/>
-            </a:avLst>
-          </a:prstGeom>
-          <a:solidFill>
-            <a:srgbClr val="B165FB"/>
-          </a:solidFill>
-          <a:ln/>
-        </p:spPr>
-        <p:txBody>
-          <a:bodyPr wrap="square" rtlCol="0" anchor="ctr"/>
-          <a:lstStyle/>
-          <a:p>
-            <a:pPr marL="0" indent="0">
-              <a:buNone/>
-            </a:pPr>
-            <a:endParaRPr lang="en-US" dirty="0"/>
-          </a:p>
-        </p:txBody>
-      </p:sp>
-      <p:sp>
-        <p:nvSpPr>
-          <p:cNvPr id="12" name="Text 10"/>
-          <p:cNvSpPr/>
-          <p:nvPr/>
-        </p:nvSpPr>
-        <p:spPr>
-          <a:xfrm>
-            <a:off x="3504009" y="1082427"/>
-            <a:ext cx="64972" cy="133350"/>
-          </a:xfrm>
-          <a:prstGeom prst="rect">
-            <a:avLst/>
-          </a:prstGeom>
-          <a:noFill/>
-          <a:ln/>
-        </p:spPr>
-        <p:txBody>
-          <a:bodyPr wrap="square" lIns="0" tIns="0" rIns="0" bIns="0" rtlCol="0" anchor="t"/>
-          <a:lstStyle/>
-          <a:p>
-            <a:pPr marL="0" indent="0" algn="l">
-              <a:buNone/>
-            </a:pPr>
-            <a:r>
-              <a:rPr lang="en-US" sz="900" b="1" dirty="0">
-                <a:solidFill>
-                  <a:srgbClr val="FFFFFF"/>
-                </a:solidFill>
-                <a:latin typeface="Arial" pitchFamily="34" charset="0"/>
-                <a:ea typeface="Arial" pitchFamily="34" charset="-122"/>
-                <a:cs typeface="Arial" pitchFamily="34" charset="-120"/>
-              </a:rPr>
-              <a:t>2</a:t>
-            </a:r>
-            <a:endParaRPr lang="en-US" sz="900" dirty="0"/>
-          </a:p>
-        </p:txBody>
-      </p:sp>
-      <p:sp>
-        <p:nvSpPr>
-          <p:cNvPr id="13" name="Text 11"/>
-          <p:cNvSpPr/>
-          <p:nvPr/>
-        </p:nvSpPr>
-        <p:spPr>
-          <a:xfrm>
-            <a:off x="3726359" y="1072902"/>
-            <a:ext cx="1247227" cy="152400"/>
-          </a:xfrm>
-          <a:prstGeom prst="rect">
-            <a:avLst/>
-          </a:prstGeom>
-          <a:noFill/>
-          <a:ln/>
-        </p:spPr>
-        <p:txBody>
-          <a:bodyPr wrap="square" lIns="0" tIns="0" rIns="0" bIns="0" rtlCol="0" anchor="t"/>
-          <a:lstStyle/>
-          <a:p>
-            <a:pPr marL="0" indent="0" algn="l">
-              <a:buNone/>
-            </a:pPr>
-            <a:r>
-              <a:rPr lang="en-US" sz="1050" b="1" dirty="0">
-                <a:solidFill>
-                  <a:srgbClr val="FFFFFF"/>
-                </a:solidFill>
-                <a:latin typeface="Arial" pitchFamily="34" charset="0"/>
-                <a:ea typeface="Arial" pitchFamily="34" charset="-122"/>
-                <a:cs typeface="Arial" pitchFamily="34" charset="-120"/>
-              </a:rPr>
-              <a:t>Pydantic Validation</a:t>
-            </a:r>
-            <a:endParaRPr lang="en-US" sz="1050" dirty="0"/>
-          </a:p>
-        </p:txBody>
-      </p:sp>
-      <p:sp>
-        <p:nvSpPr>
-          <p:cNvPr id="14" name="Text 12"/>
-          <p:cNvSpPr/>
-          <p:nvPr/>
-        </p:nvSpPr>
-        <p:spPr>
-          <a:xfrm>
-            <a:off x="3421559" y="1314152"/>
-            <a:ext cx="2346749" cy="420588"/>
-          </a:xfrm>
-          <a:prstGeom prst="rect">
-            <a:avLst/>
-          </a:prstGeom>
-          <a:noFill/>
-          <a:ln/>
-        </p:spPr>
-        <p:txBody>
-          <a:bodyPr wrap="square" lIns="0" tIns="0" rIns="0" bIns="0" rtlCol="0" anchor="t"/>
-          <a:lstStyle/>
-          <a:p>
-            <a:pPr marL="0" indent="0" algn="l">
-              <a:lnSpc>
-                <a:spcPts val="1105"/>
-              </a:lnSpc>
-              <a:buNone/>
-            </a:pPr>
-            <a:r>
-              <a:rPr lang="en-US" sz="850" dirty="0">
-                <a:solidFill>
-                  <a:srgbClr val="AAAAAA"/>
-                </a:solidFill>
-                <a:latin typeface="Arial" pitchFamily="34" charset="0"/>
-                <a:ea typeface="Arial" pitchFamily="34" charset="-122"/>
-                <a:cs typeface="Arial" pitchFamily="34" charset="-120"/>
-              </a:rPr>
-              <a:t>Every action is a Pydantic model with extra="forbid". LLM cannot pass unexpected fields.</a:t>
-            </a:r>
-            <a:endParaRPr lang="en-US" sz="850" dirty="0"/>
-          </a:p>
-        </p:txBody>
-      </p:sp>
-      <p:sp>
-        <p:nvSpPr>
-          <p:cNvPr id="15" name="Text 13"/>
-          <p:cNvSpPr/>
-          <p:nvPr/>
-        </p:nvSpPr>
-        <p:spPr>
-          <a:xfrm>
-            <a:off x="6011168" y="898327"/>
-            <a:ext cx="2624733" cy="972889"/>
-          </a:xfrm>
-          <a:prstGeom prst="roundRect">
-            <a:avLst>
-              <a:gd name="adj" fmla="val 7832"/>
-            </a:avLst>
-          </a:prstGeom>
-          <a:solidFill>
-            <a:srgbClr val="FFFFFF">
-              <a:alpha val="3000"/>
-            </a:srgbClr>
-          </a:solidFill>
-          <a:ln w="9525">
-            <a:solidFill>
-              <a:srgbClr val="FFFFFF"/>
-            </a:solidFill>
-          </a:ln>
-        </p:spPr>
-        <p:txBody>
-          <a:bodyPr wrap="square" rtlCol="0" anchor="ctr"/>
-          <a:lstStyle/>
-          <a:p>
-            <a:pPr marL="0" indent="0">
-              <a:buNone/>
-            </a:pPr>
-            <a:endParaRPr lang="en-US" dirty="0"/>
-          </a:p>
-        </p:txBody>
-      </p:sp>
-      <p:sp>
-        <p:nvSpPr>
-          <p:cNvPr id="16" name="Text 14"/>
-          <p:cNvSpPr/>
-          <p:nvPr/>
-        </p:nvSpPr>
-        <p:spPr>
-          <a:xfrm>
-            <a:off x="6173093" y="1034802"/>
-            <a:ext cx="228600" cy="228600"/>
-          </a:xfrm>
-          <a:prstGeom prst="roundRect">
-            <a:avLst>
-              <a:gd name="adj" fmla="val 22222"/>
-            </a:avLst>
-          </a:prstGeom>
-          <a:solidFill>
-            <a:srgbClr val="B165FB"/>
-          </a:solidFill>
-          <a:ln/>
-        </p:spPr>
-        <p:txBody>
-          <a:bodyPr wrap="square" rtlCol="0" anchor="ctr"/>
-          <a:lstStyle/>
-          <a:p>
-            <a:pPr marL="0" indent="0">
-              <a:buNone/>
-            </a:pPr>
-            <a:endParaRPr lang="en-US" dirty="0"/>
-          </a:p>
-        </p:txBody>
-      </p:sp>
-      <p:sp>
-        <p:nvSpPr>
-          <p:cNvPr id="17" name="Text 15"/>
-          <p:cNvSpPr/>
-          <p:nvPr/>
-        </p:nvSpPr>
-        <p:spPr>
-          <a:xfrm>
-            <a:off x="6255544" y="1082427"/>
-            <a:ext cx="64972" cy="133350"/>
-          </a:xfrm>
-          <a:prstGeom prst="rect">
-            <a:avLst/>
-          </a:prstGeom>
-          <a:noFill/>
-          <a:ln/>
-        </p:spPr>
-        <p:txBody>
-          <a:bodyPr wrap="square" lIns="0" tIns="0" rIns="0" bIns="0" rtlCol="0" anchor="t"/>
-          <a:lstStyle/>
-          <a:p>
-            <a:pPr marL="0" indent="0" algn="l">
-              <a:buNone/>
-            </a:pPr>
-            <a:r>
-              <a:rPr lang="en-US" sz="900" b="1" dirty="0">
-                <a:solidFill>
-                  <a:srgbClr val="FFFFFF"/>
-                </a:solidFill>
-                <a:latin typeface="Arial" pitchFamily="34" charset="0"/>
-                <a:ea typeface="Arial" pitchFamily="34" charset="-122"/>
-                <a:cs typeface="Arial" pitchFamily="34" charset="-120"/>
-              </a:rPr>
-              <a:t>3</a:t>
-            </a:r>
-            <a:endParaRPr lang="en-US" sz="900" dirty="0"/>
-          </a:p>
-        </p:txBody>
-      </p:sp>
-      <p:sp>
-        <p:nvSpPr>
-          <p:cNvPr id="18" name="Text 16"/>
-          <p:cNvSpPr/>
-          <p:nvPr/>
-        </p:nvSpPr>
-        <p:spPr>
-          <a:xfrm>
-            <a:off x="6477893" y="1072902"/>
-            <a:ext cx="1126239" cy="152400"/>
-          </a:xfrm>
-          <a:prstGeom prst="rect">
-            <a:avLst/>
-          </a:prstGeom>
-          <a:noFill/>
-          <a:ln/>
-        </p:spPr>
-        <p:txBody>
-          <a:bodyPr wrap="square" lIns="0" tIns="0" rIns="0" bIns="0" rtlCol="0" anchor="t"/>
-          <a:lstStyle/>
-          <a:p>
-            <a:pPr marL="0" indent="0" algn="l">
-              <a:buNone/>
-            </a:pPr>
-            <a:r>
-              <a:rPr lang="en-US" sz="1050" b="1" dirty="0">
-                <a:solidFill>
-                  <a:srgbClr val="FFFFFF"/>
-                </a:solidFill>
-                <a:latin typeface="Arial" pitchFamily="34" charset="0"/>
-                <a:ea typeface="Arial" pitchFamily="34" charset="-122"/>
-                <a:cs typeface="Arial" pitchFamily="34" charset="-120"/>
-              </a:rPr>
-              <a:t>YAML inside XML</a:t>
-            </a:r>
-            <a:endParaRPr lang="en-US" sz="1050" dirty="0"/>
-          </a:p>
-        </p:txBody>
-      </p:sp>
-      <p:sp>
-        <p:nvSpPr>
-          <p:cNvPr id="19" name="Text 17"/>
-          <p:cNvSpPr/>
-          <p:nvPr/>
-        </p:nvSpPr>
-        <p:spPr>
-          <a:xfrm>
-            <a:off x="6173093" y="1314152"/>
-            <a:ext cx="2346900" cy="420588"/>
-          </a:xfrm>
-          <a:prstGeom prst="rect">
-            <a:avLst/>
-          </a:prstGeom>
-          <a:noFill/>
-          <a:ln/>
-        </p:spPr>
-        <p:txBody>
-          <a:bodyPr wrap="square" lIns="0" tIns="0" rIns="0" bIns="0" rtlCol="0" anchor="t"/>
-          <a:lstStyle/>
-          <a:p>
-            <a:pPr marL="0" indent="0" algn="l">
-              <a:lnSpc>
-                <a:spcPts val="1105"/>
-              </a:lnSpc>
-              <a:buNone/>
-            </a:pPr>
-            <a:r>
-              <a:rPr lang="en-US" sz="850" dirty="0">
-                <a:solidFill>
-                  <a:srgbClr val="AAAAAA"/>
-                </a:solidFill>
-                <a:latin typeface="Arial" pitchFamily="34" charset="0"/>
-                <a:ea typeface="Arial" pitchFamily="34" charset="-122"/>
-                <a:cs typeface="Arial" pitchFamily="34" charset="-120"/>
-              </a:rPr>
-              <a:t>XML tags define action boundaries, YAML provides structured data. Clean parsing with clear semantics.</a:t>
-            </a:r>
-            <a:endParaRPr lang="en-US" sz="850" dirty="0"/>
-          </a:p>
-        </p:txBody>
-      </p:sp>
-      <p:sp>
-        <p:nvSpPr>
-          <p:cNvPr id="20" name="Text 18"/>
-          <p:cNvSpPr/>
-          <p:nvPr/>
-        </p:nvSpPr>
-        <p:spPr>
-          <a:xfrm>
-            <a:off x="507950" y="1972717"/>
-            <a:ext cx="2624733" cy="972889"/>
-          </a:xfrm>
-          <a:prstGeom prst="roundRect">
-            <a:avLst>
-              <a:gd name="adj" fmla="val 7832"/>
-            </a:avLst>
-          </a:prstGeom>
-          <a:solidFill>
-            <a:srgbClr val="FFFFFF">
-              <a:alpha val="3000"/>
-            </a:srgbClr>
-          </a:solidFill>
-          <a:ln w="9525">
-            <a:solidFill>
-              <a:srgbClr val="FFFFFF"/>
-            </a:solidFill>
-          </a:ln>
-        </p:spPr>
-        <p:txBody>
-          <a:bodyPr wrap="square" rtlCol="0" anchor="ctr"/>
-          <a:lstStyle/>
-          <a:p>
-            <a:pPr marL="0" indent="0">
-              <a:buNone/>
-            </a:pPr>
-            <a:endParaRPr lang="en-US" dirty="0"/>
-          </a:p>
-        </p:txBody>
-      </p:sp>
-      <p:sp>
-        <p:nvSpPr>
-          <p:cNvPr id="21" name="Text 19"/>
-          <p:cNvSpPr/>
-          <p:nvPr/>
-        </p:nvSpPr>
-        <p:spPr>
-          <a:xfrm>
-            <a:off x="669875" y="2109192"/>
-            <a:ext cx="228600" cy="228600"/>
-          </a:xfrm>
-          <a:prstGeom prst="roundRect">
-            <a:avLst>
-              <a:gd name="adj" fmla="val 22222"/>
-            </a:avLst>
-          </a:prstGeom>
-          <a:solidFill>
-            <a:srgbClr val="B165FB"/>
-          </a:solidFill>
-          <a:ln/>
-        </p:spPr>
-        <p:txBody>
-          <a:bodyPr wrap="square" rtlCol="0" anchor="ctr"/>
-          <a:lstStyle/>
-          <a:p>
-            <a:pPr marL="0" indent="0">
-              <a:buNone/>
-            </a:pPr>
-            <a:endParaRPr lang="en-US" dirty="0"/>
-          </a:p>
-        </p:txBody>
-      </p:sp>
-      <p:sp>
-        <p:nvSpPr>
-          <p:cNvPr id="22" name="Text 20"/>
-          <p:cNvSpPr/>
-          <p:nvPr/>
-        </p:nvSpPr>
-        <p:spPr>
-          <a:xfrm>
-            <a:off x="752326" y="2156817"/>
-            <a:ext cx="64972" cy="133350"/>
-          </a:xfrm>
-          <a:prstGeom prst="rect">
-            <a:avLst/>
-          </a:prstGeom>
-          <a:noFill/>
-          <a:ln/>
-        </p:spPr>
-        <p:txBody>
-          <a:bodyPr wrap="square" lIns="0" tIns="0" rIns="0" bIns="0" rtlCol="0" anchor="t"/>
-          <a:lstStyle/>
-          <a:p>
-            <a:pPr marL="0" indent="0" algn="l">
-              <a:buNone/>
-            </a:pPr>
-            <a:r>
-              <a:rPr lang="en-US" sz="900" b="1" dirty="0">
-                <a:solidFill>
-                  <a:srgbClr val="FFFFFF"/>
-                </a:solidFill>
-                <a:latin typeface="Arial" pitchFamily="34" charset="0"/>
-                <a:ea typeface="Arial" pitchFamily="34" charset="-122"/>
-                <a:cs typeface="Arial" pitchFamily="34" charset="-120"/>
-              </a:rPr>
-              <a:t>4</a:t>
-            </a:r>
-            <a:endParaRPr lang="en-US" sz="900" dirty="0"/>
-          </a:p>
-        </p:txBody>
-      </p:sp>
-      <p:sp>
-        <p:nvSpPr>
-          <p:cNvPr id="23" name="Text 21"/>
-          <p:cNvSpPr/>
-          <p:nvPr/>
-        </p:nvSpPr>
-        <p:spPr>
-          <a:xfrm>
-            <a:off x="974675" y="2147292"/>
-            <a:ext cx="1300207" cy="152400"/>
-          </a:xfrm>
-          <a:prstGeom prst="rect">
-            <a:avLst/>
-          </a:prstGeom>
-          <a:noFill/>
-          <a:ln/>
-        </p:spPr>
-        <p:txBody>
-          <a:bodyPr wrap="square" lIns="0" tIns="0" rIns="0" bIns="0" rtlCol="0" anchor="t"/>
-          <a:lstStyle/>
-          <a:p>
-            <a:pPr marL="0" indent="0" algn="l">
-              <a:buNone/>
-            </a:pPr>
-            <a:r>
-              <a:rPr lang="en-US" sz="1050" b="1" dirty="0">
-                <a:solidFill>
-                  <a:srgbClr val="FFFFFF"/>
-                </a:solidFill>
-                <a:latin typeface="Arial" pitchFamily="34" charset="0"/>
-                <a:ea typeface="Arial" pitchFamily="34" charset="-122"/>
-                <a:cs typeface="Arial" pitchFamily="34" charset="-120"/>
-              </a:rPr>
-              <a:t>Middleware Pipeline</a:t>
-            </a:r>
-            <a:endParaRPr lang="en-US" sz="1050" dirty="0"/>
-          </a:p>
-        </p:txBody>
-      </p:sp>
-      <p:sp>
-        <p:nvSpPr>
-          <p:cNvPr id="24" name="Text 22"/>
-          <p:cNvSpPr/>
-          <p:nvPr/>
-        </p:nvSpPr>
-        <p:spPr>
-          <a:xfrm>
-            <a:off x="669875" y="2388543"/>
-            <a:ext cx="2346900" cy="420588"/>
-          </a:xfrm>
-          <a:prstGeom prst="rect">
-            <a:avLst/>
-          </a:prstGeom>
-          <a:noFill/>
-          <a:ln/>
-        </p:spPr>
-        <p:txBody>
-          <a:bodyPr wrap="square" lIns="0" tIns="0" rIns="0" bIns="0" rtlCol="0" anchor="t"/>
-          <a:lstStyle/>
-          <a:p>
-            <a:pPr marL="0" indent="0" algn="l">
-              <a:lnSpc>
-                <a:spcPts val="1105"/>
-              </a:lnSpc>
-              <a:buNone/>
-            </a:pPr>
-            <a:r>
-              <a:rPr lang="en-US" sz="850" dirty="0">
-                <a:solidFill>
-                  <a:srgbClr val="AAAAAA"/>
-                </a:solidFill>
-                <a:latin typeface="Arial" pitchFamily="34" charset="0"/>
-                <a:ea typeface="Arial" pitchFamily="34" charset="-122"/>
-                <a:cs typeface="Arial" pitchFamily="34" charset="-120"/>
-              </a:rPr>
-              <a:t>Cross-cutting concerns separated from action logic via before/after hooks with chain unwinding.</a:t>
-            </a:r>
-            <a:endParaRPr lang="en-US" sz="850" dirty="0"/>
-          </a:p>
-        </p:txBody>
-      </p:sp>
-      <p:sp>
-        <p:nvSpPr>
-          <p:cNvPr id="25" name="Text 23"/>
-          <p:cNvSpPr/>
-          <p:nvPr/>
-        </p:nvSpPr>
-        <p:spPr>
-          <a:xfrm>
-            <a:off x="3259634" y="1972717"/>
-            <a:ext cx="2624584" cy="972889"/>
-          </a:xfrm>
-          <a:prstGeom prst="roundRect">
-            <a:avLst>
-              <a:gd name="adj" fmla="val 7832"/>
-            </a:avLst>
-          </a:prstGeom>
-          <a:solidFill>
-            <a:srgbClr val="FFFFFF">
-              <a:alpha val="3000"/>
-            </a:srgbClr>
-          </a:solidFill>
-          <a:ln w="9525">
-            <a:solidFill>
-              <a:srgbClr val="FFFFFF"/>
-            </a:solidFill>
-          </a:ln>
-        </p:spPr>
-        <p:txBody>
-          <a:bodyPr wrap="square" rtlCol="0" anchor="ctr"/>
-          <a:lstStyle/>
-          <a:p>
-            <a:pPr marL="0" indent="0">
-              <a:buNone/>
-            </a:pPr>
-            <a:endParaRPr lang="en-US" dirty="0"/>
-          </a:p>
-        </p:txBody>
-      </p:sp>
-      <p:sp>
-        <p:nvSpPr>
-          <p:cNvPr id="26" name="Text 24"/>
-          <p:cNvSpPr/>
-          <p:nvPr/>
-        </p:nvSpPr>
-        <p:spPr>
-          <a:xfrm>
-            <a:off x="3421559" y="2109192"/>
-            <a:ext cx="228600" cy="228600"/>
-          </a:xfrm>
-          <a:prstGeom prst="roundRect">
-            <a:avLst>
-              <a:gd name="adj" fmla="val 22222"/>
-            </a:avLst>
-          </a:prstGeom>
-          <a:solidFill>
-            <a:srgbClr val="B165FB"/>
-          </a:solidFill>
-          <a:ln/>
-        </p:spPr>
-        <p:txBody>
-          <a:bodyPr wrap="square" rtlCol="0" anchor="ctr"/>
-          <a:lstStyle/>
-          <a:p>
-            <a:pPr marL="0" indent="0">
-              <a:buNone/>
-            </a:pPr>
-            <a:endParaRPr lang="en-US" dirty="0"/>
-          </a:p>
-        </p:txBody>
-      </p:sp>
-      <p:sp>
-        <p:nvSpPr>
-          <p:cNvPr id="27" name="Text 25"/>
-          <p:cNvSpPr/>
-          <p:nvPr/>
-        </p:nvSpPr>
-        <p:spPr>
-          <a:xfrm>
-            <a:off x="3504009" y="2156817"/>
-            <a:ext cx="64972" cy="133350"/>
-          </a:xfrm>
-          <a:prstGeom prst="rect">
-            <a:avLst/>
-          </a:prstGeom>
-          <a:noFill/>
-          <a:ln/>
-        </p:spPr>
-        <p:txBody>
-          <a:bodyPr wrap="square" lIns="0" tIns="0" rIns="0" bIns="0" rtlCol="0" anchor="t"/>
-          <a:lstStyle/>
-          <a:p>
-            <a:pPr marL="0" indent="0" algn="l">
-              <a:buNone/>
-            </a:pPr>
-            <a:r>
-              <a:rPr lang="en-US" sz="900" b="1" dirty="0">
-                <a:solidFill>
-                  <a:srgbClr val="FFFFFF"/>
-                </a:solidFill>
-                <a:latin typeface="Arial" pitchFamily="34" charset="0"/>
-                <a:ea typeface="Arial" pitchFamily="34" charset="-122"/>
-                <a:cs typeface="Arial" pitchFamily="34" charset="-120"/>
-              </a:rPr>
-              <a:t>5</a:t>
-            </a:r>
-            <a:endParaRPr lang="en-US" sz="900" dirty="0"/>
-          </a:p>
-        </p:txBody>
-      </p:sp>
-      <p:sp>
-        <p:nvSpPr>
-          <p:cNvPr id="28" name="Text 26"/>
-          <p:cNvSpPr/>
-          <p:nvPr/>
-        </p:nvSpPr>
-        <p:spPr>
-          <a:xfrm>
-            <a:off x="3726359" y="2147292"/>
-            <a:ext cx="1264685" cy="152400"/>
-          </a:xfrm>
-          <a:prstGeom prst="rect">
-            <a:avLst/>
-          </a:prstGeom>
-          <a:noFill/>
-          <a:ln/>
-        </p:spPr>
-        <p:txBody>
-          <a:bodyPr wrap="square" lIns="0" tIns="0" rIns="0" bIns="0" rtlCol="0" anchor="t"/>
-          <a:lstStyle/>
-          <a:p>
-            <a:pPr marL="0" indent="0" algn="l">
-              <a:buNone/>
-            </a:pPr>
-            <a:r>
-              <a:rPr lang="en-US" sz="1050" b="1" dirty="0">
-                <a:solidFill>
-                  <a:srgbClr val="FFFFFF"/>
-                </a:solidFill>
-                <a:latin typeface="Arial" pitchFamily="34" charset="0"/>
-                <a:ea typeface="Arial" pitchFamily="34" charset="-122"/>
-                <a:cs typeface="Arial" pitchFamily="34" charset="-120"/>
-              </a:rPr>
-              <a:t>Error Accumulation</a:t>
-            </a:r>
-            <a:endParaRPr lang="en-US" sz="1050" dirty="0"/>
-          </a:p>
-        </p:txBody>
-      </p:sp>
-      <p:sp>
-        <p:nvSpPr>
-          <p:cNvPr id="29" name="Text 27"/>
-          <p:cNvSpPr/>
-          <p:nvPr/>
-        </p:nvSpPr>
-        <p:spPr>
-          <a:xfrm>
-            <a:off x="3421559" y="2388543"/>
-            <a:ext cx="2346749" cy="420588"/>
-          </a:xfrm>
-          <a:prstGeom prst="rect">
-            <a:avLst/>
-          </a:prstGeom>
-          <a:noFill/>
-          <a:ln/>
-        </p:spPr>
-        <p:txBody>
-          <a:bodyPr wrap="square" lIns="0" tIns="0" rIns="0" bIns="0" rtlCol="0" anchor="t"/>
-          <a:lstStyle/>
-          <a:p>
-            <a:pPr marL="0" indent="0" algn="l">
-              <a:lnSpc>
-                <a:spcPts val="1105"/>
-              </a:lnSpc>
-              <a:buNone/>
-            </a:pPr>
-            <a:r>
-              <a:rPr lang="en-US" sz="850" dirty="0">
-                <a:solidFill>
-                  <a:srgbClr val="AAAAAA"/>
-                </a:solidFill>
-                <a:latin typeface="Arial" pitchFamily="34" charset="0"/>
-                <a:ea typeface="Arial" pitchFamily="34" charset="-122"/>
-                <a:cs typeface="Arial" pitchFamily="34" charset="-120"/>
-              </a:rPr>
-              <a:t>Errors are OR-accumulated, not short-circuited. Parse and execution errors collected for the agent.</a:t>
-            </a:r>
-            <a:endParaRPr lang="en-US" sz="850" dirty="0"/>
-          </a:p>
-        </p:txBody>
-      </p:sp>
-      <p:sp>
-        <p:nvSpPr>
-          <p:cNvPr id="30" name="Text 28"/>
-          <p:cNvSpPr/>
-          <p:nvPr/>
-        </p:nvSpPr>
-        <p:spPr>
-          <a:xfrm>
-            <a:off x="6011168" y="1972717"/>
-            <a:ext cx="2624733" cy="972889"/>
-          </a:xfrm>
-          <a:prstGeom prst="roundRect">
-            <a:avLst>
-              <a:gd name="adj" fmla="val 7832"/>
-            </a:avLst>
-          </a:prstGeom>
-          <a:solidFill>
-            <a:srgbClr val="FFFFFF">
-              <a:alpha val="3000"/>
-            </a:srgbClr>
-          </a:solidFill>
-          <a:ln w="9525">
-            <a:solidFill>
-              <a:srgbClr val="FFFFFF"/>
-            </a:solidFill>
-          </a:ln>
-        </p:spPr>
-        <p:txBody>
-          <a:bodyPr wrap="square" rtlCol="0" anchor="ctr"/>
-          <a:lstStyle/>
-          <a:p>
-            <a:pPr marL="0" indent="0">
-              <a:buNone/>
-            </a:pPr>
-            <a:endParaRPr lang="en-US" dirty="0"/>
-          </a:p>
-        </p:txBody>
-      </p:sp>
-      <p:sp>
-        <p:nvSpPr>
-          <p:cNvPr id="31" name="Text 29"/>
-          <p:cNvSpPr/>
-          <p:nvPr/>
-        </p:nvSpPr>
-        <p:spPr>
-          <a:xfrm>
-            <a:off x="6173093" y="2109192"/>
-            <a:ext cx="228600" cy="228600"/>
-          </a:xfrm>
-          <a:prstGeom prst="roundRect">
-            <a:avLst>
-              <a:gd name="adj" fmla="val 22222"/>
-            </a:avLst>
-          </a:prstGeom>
-          <a:solidFill>
-            <a:srgbClr val="B165FB"/>
-          </a:solidFill>
-          <a:ln/>
-        </p:spPr>
-        <p:txBody>
-          <a:bodyPr wrap="square" rtlCol="0" anchor="ctr"/>
-          <a:lstStyle/>
-          <a:p>
-            <a:pPr marL="0" indent="0">
-              <a:buNone/>
-            </a:pPr>
-            <a:endParaRPr lang="en-US" dirty="0"/>
-          </a:p>
-        </p:txBody>
-      </p:sp>
-      <p:sp>
-        <p:nvSpPr>
-          <p:cNvPr id="32" name="Text 30"/>
-          <p:cNvSpPr/>
-          <p:nvPr/>
-        </p:nvSpPr>
-        <p:spPr>
-          <a:xfrm>
-            <a:off x="6255544" y="2156817"/>
-            <a:ext cx="64972" cy="133350"/>
-          </a:xfrm>
-          <a:prstGeom prst="rect">
-            <a:avLst/>
-          </a:prstGeom>
-          <a:noFill/>
-          <a:ln/>
-        </p:spPr>
-        <p:txBody>
-          <a:bodyPr wrap="square" lIns="0" tIns="0" rIns="0" bIns="0" rtlCol="0" anchor="t"/>
-          <a:lstStyle/>
-          <a:p>
-            <a:pPr marL="0" indent="0" algn="l">
-              <a:buNone/>
-            </a:pPr>
-            <a:r>
-              <a:rPr lang="en-US" sz="900" b="1" dirty="0">
-                <a:solidFill>
-                  <a:srgbClr val="FFFFFF"/>
-                </a:solidFill>
-                <a:latin typeface="Arial" pitchFamily="34" charset="0"/>
-                <a:ea typeface="Arial" pitchFamily="34" charset="-122"/>
-                <a:cs typeface="Arial" pitchFamily="34" charset="-120"/>
-              </a:rPr>
-              <a:t>6</a:t>
-            </a:r>
-            <a:endParaRPr lang="en-US" sz="900" dirty="0"/>
-          </a:p>
-        </p:txBody>
-      </p:sp>
-      <p:sp>
-        <p:nvSpPr>
-          <p:cNvPr id="33" name="Text 31"/>
-          <p:cNvSpPr/>
-          <p:nvPr/>
-        </p:nvSpPr>
-        <p:spPr>
-          <a:xfrm>
-            <a:off x="6477893" y="2147292"/>
-            <a:ext cx="1239485" cy="152400"/>
-          </a:xfrm>
-          <a:prstGeom prst="rect">
-            <a:avLst/>
-          </a:prstGeom>
-          <a:noFill/>
-          <a:ln/>
-        </p:spPr>
-        <p:txBody>
-          <a:bodyPr wrap="square" lIns="0" tIns="0" rIns="0" bIns="0" rtlCol="0" anchor="t"/>
-          <a:lstStyle/>
-          <a:p>
-            <a:pPr marL="0" indent="0" algn="l">
-              <a:buNone/>
-            </a:pPr>
-            <a:r>
-              <a:rPr lang="en-US" sz="1050" b="1" dirty="0">
-                <a:solidFill>
-                  <a:srgbClr val="FFFFFF"/>
-                </a:solidFill>
-                <a:latin typeface="Arial" pitchFamily="34" charset="0"/>
-                <a:ea typeface="Arial" pitchFamily="34" charset="-122"/>
-                <a:cs typeface="Arial" pitchFamily="34" charset="-120"/>
-              </a:rPr>
-              <a:t>Built-in Verification</a:t>
-            </a:r>
-            <a:endParaRPr lang="en-US" sz="1050" dirty="0"/>
-          </a:p>
-        </p:txBody>
-      </p:sp>
-      <p:sp>
-        <p:nvSpPr>
-          <p:cNvPr id="34" name="Text 32"/>
-          <p:cNvSpPr/>
-          <p:nvPr/>
-        </p:nvSpPr>
-        <p:spPr>
-          <a:xfrm>
-            <a:off x="6173093" y="2388543"/>
-            <a:ext cx="2346900" cy="420588"/>
-          </a:xfrm>
-          <a:prstGeom prst="rect">
-            <a:avLst/>
-          </a:prstGeom>
-          <a:noFill/>
-          <a:ln/>
-        </p:spPr>
-        <p:txBody>
-          <a:bodyPr wrap="square" lIns="0" tIns="0" rIns="0" bIns="0" rtlCol="0" anchor="t"/>
-          <a:lstStyle/>
-          <a:p>
-            <a:pPr marL="0" indent="0" algn="l">
-              <a:lnSpc>
-                <a:spcPts val="1105"/>
-              </a:lnSpc>
-              <a:buNone/>
-            </a:pPr>
-            <a:r>
-              <a:rPr lang="en-US" sz="850" dirty="0">
-                <a:solidFill>
-                  <a:srgbClr val="AAAAAA"/>
-                </a:solidFill>
-                <a:latin typeface="Arial" pitchFamily="34" charset="0"/>
-                <a:ea typeface="Arial" pitchFamily="34" charset="-122"/>
-                <a:cs typeface="Arial" pitchFamily="34" charset="-120"/>
-              </a:rPr>
-              <a:t>Explorer agents verify all implementations. Test execution built into the workflow, not an afterthought.</a:t>
-            </a:r>
-            <a:endParaRPr lang="en-US" sz="850" dirty="0"/>
-          </a:p>
-        </p:txBody>
-      </p:sp>
-    </p:spTree>
-  </p:cSld>
-  <p:clrMapOvr>
-    <a:masterClrMapping/>
-  </p:clrMapOvr>
-</p:sld>
-</file>
-
-<file path=ppt/slides/slide11.xml><?xml version="1.0" encoding="utf-8"?>
 <p:sld xmlns:a="http://schemas.openxmlformats.org/drawingml/2006/main" xmlns:r="http://schemas.openxmlformats.org/officeDocument/2006/relationships" xmlns:p="http://schemas.openxmlformats.org/presentationml/2006/main">
   <p:cSld name="Slide 11">
     <p:bg>
@@ -4272,7 +2870,7 @@
         </p:nvSpPr>
         <p:spPr>
           <a:xfrm>
-            <a:off x="634901" y="1473696"/>
+            <a:off x="634901" y="1406790"/>
             <a:ext cx="4133552" cy="818555"/>
           </a:xfrm>
           <a:prstGeom prst="roundRect">
@@ -4310,7 +2908,7 @@
         </p:nvSpPr>
         <p:spPr>
           <a:xfrm>
-            <a:off x="822127" y="1635621"/>
+            <a:off x="822127" y="1583583"/>
             <a:ext cx="3834283" cy="164902"/>
           </a:xfrm>
           <a:prstGeom prst="rect">
@@ -4352,7 +2950,7 @@
         </p:nvSpPr>
         <p:spPr>
           <a:xfrm>
-            <a:off x="822127" y="1800523"/>
+            <a:off x="822127" y="1748485"/>
             <a:ext cx="3834283" cy="329803"/>
           </a:xfrm>
           <a:prstGeom prst="rect">
@@ -4394,7 +2992,7 @@
         </p:nvSpPr>
         <p:spPr>
           <a:xfrm>
-            <a:off x="634901" y="2419201"/>
+            <a:off x="634901" y="2352295"/>
             <a:ext cx="4133552" cy="818555"/>
           </a:xfrm>
           <a:prstGeom prst="roundRect">
@@ -4432,7 +3030,7 @@
         </p:nvSpPr>
         <p:spPr>
           <a:xfrm>
-            <a:off x="822127" y="2581126"/>
+            <a:off x="822127" y="2529088"/>
             <a:ext cx="3834283" cy="164902"/>
           </a:xfrm>
           <a:prstGeom prst="rect">
@@ -4474,7 +3072,7 @@
         </p:nvSpPr>
         <p:spPr>
           <a:xfrm>
-            <a:off x="822127" y="2746028"/>
+            <a:off x="822127" y="2693990"/>
             <a:ext cx="3834283" cy="329803"/>
           </a:xfrm>
           <a:prstGeom prst="rect">
@@ -4516,7 +3114,7 @@
         </p:nvSpPr>
         <p:spPr>
           <a:xfrm>
-            <a:off x="634901" y="3364706"/>
+            <a:off x="634901" y="3297800"/>
             <a:ext cx="4133552" cy="818555"/>
           </a:xfrm>
           <a:prstGeom prst="roundRect">
@@ -4554,7 +3152,7 @@
         </p:nvSpPr>
         <p:spPr>
           <a:xfrm>
-            <a:off x="822127" y="3526631"/>
+            <a:off x="822127" y="3474593"/>
             <a:ext cx="3834283" cy="164902"/>
           </a:xfrm>
           <a:prstGeom prst="rect">
@@ -4596,7 +3194,7 @@
         </p:nvSpPr>
         <p:spPr>
           <a:xfrm>
-            <a:off x="822127" y="3691533"/>
+            <a:off x="822127" y="3639495"/>
             <a:ext cx="3834283" cy="329803"/>
           </a:xfrm>
           <a:prstGeom prst="rect">
@@ -4638,7 +3236,7 @@
         </p:nvSpPr>
         <p:spPr>
           <a:xfrm>
-            <a:off x="634901" y="4310211"/>
+            <a:off x="634901" y="4243305"/>
             <a:ext cx="4133552" cy="818555"/>
           </a:xfrm>
           <a:prstGeom prst="roundRect">
@@ -4676,7 +3274,7 @@
         </p:nvSpPr>
         <p:spPr>
           <a:xfrm>
-            <a:off x="822127" y="4472136"/>
+            <a:off x="822127" y="4420098"/>
             <a:ext cx="3834283" cy="164902"/>
           </a:xfrm>
           <a:prstGeom prst="rect">
@@ -4718,7 +3316,7 @@
         </p:nvSpPr>
         <p:spPr>
           <a:xfrm>
-            <a:off x="822127" y="4637038"/>
+            <a:off x="822127" y="4585000"/>
             <a:ext cx="3834283" cy="329803"/>
           </a:xfrm>
           <a:prstGeom prst="rect">
@@ -4889,136 +3487,14 @@
       </p:sp>
       <p:sp>
         <p:nvSpPr>
-          <p:cNvPr id="5" name="Text 3"/>
-          <p:cNvSpPr/>
-          <p:nvPr/>
-        </p:nvSpPr>
-        <p:spPr>
-          <a:xfrm>
-            <a:off x="634901" y="1285726"/>
-            <a:ext cx="2539901" cy="713631"/>
-          </a:xfrm>
-          <a:prstGeom prst="roundRect">
-            <a:avLst>
-              <a:gd name="adj" fmla="val 14237"/>
-            </a:avLst>
-          </a:prstGeom>
-          <a:solidFill>
-            <a:srgbClr val="40695B">
-              <a:alpha val="30000"/>
-            </a:srgbClr>
-          </a:solidFill>
-          <a:ln w="19050">
-            <a:solidFill>
-              <a:srgbClr val="40695B"/>
-            </a:solidFill>
-          </a:ln>
-        </p:spPr>
-        <p:txBody>
-          <a:bodyPr wrap="square" rtlCol="0" anchor="ctr"/>
-          <a:lstStyle/>
-          <a:p>
-            <a:pPr marL="0" indent="0">
-              <a:buNone/>
-            </a:pPr>
-            <a:endParaRPr lang="en-US" dirty="0"/>
-          </a:p>
-        </p:txBody>
-      </p:sp>
-      <p:sp>
-        <p:nvSpPr>
-          <p:cNvPr id="6" name="Text 4"/>
-          <p:cNvSpPr/>
-          <p:nvPr/>
-        </p:nvSpPr>
-        <p:spPr>
-          <a:xfrm>
-            <a:off x="810188" y="1457176"/>
-            <a:ext cx="2189327" cy="171450"/>
-          </a:xfrm>
-          <a:prstGeom prst="rect">
-            <a:avLst/>
-          </a:prstGeom>
-          <a:noFill/>
-          <a:ln/>
-        </p:spPr>
-        <p:txBody>
-          <a:bodyPr wrap="square" lIns="0" tIns="0" rIns="0" bIns="0" rtlCol="0" anchor="t"/>
-          <a:lstStyle/>
-          <a:p>
-            <a:pPr marL="0" indent="0" algn="ctr">
-              <a:spcAft>
-                <a:spcPts val="400"/>
-              </a:spcAft>
-              <a:buNone/>
-            </a:pPr>
-            <a:r>
-              <a:rPr lang="en-US" sz="1200" b="1" dirty="0">
-                <a:solidFill>
-                  <a:srgbClr val="40695B"/>
-                </a:solidFill>
-                <a:latin typeface="Arial" pitchFamily="34" charset="0"/>
-                <a:ea typeface="Arial" pitchFamily="34" charset="-122"/>
-                <a:cs typeface="Arial" pitchFamily="34" charset="-120"/>
-              </a:rPr>
-              <a:t>User</a:t>
-            </a:r>
-            <a:endParaRPr lang="en-US" sz="1200" dirty="0"/>
-          </a:p>
-        </p:txBody>
-      </p:sp>
-      <p:sp>
-        <p:nvSpPr>
-          <p:cNvPr id="7" name="Text 5"/>
-          <p:cNvSpPr/>
-          <p:nvPr/>
-        </p:nvSpPr>
-        <p:spPr>
-          <a:xfrm>
-            <a:off x="810188" y="1679377"/>
-            <a:ext cx="2189327" cy="148530"/>
-          </a:xfrm>
-          <a:prstGeom prst="rect">
-            <a:avLst/>
-          </a:prstGeom>
-          <a:noFill/>
-          <a:ln/>
-        </p:spPr>
-        <p:txBody>
-          <a:bodyPr wrap="square" lIns="0" tIns="0" rIns="0" bIns="0" rtlCol="0" anchor="t"/>
-          <a:lstStyle/>
-          <a:p>
-            <a:pPr marL="0" indent="0" algn="ctr">
-              <a:lnSpc>
-                <a:spcPts val="1170"/>
-              </a:lnSpc>
-              <a:buNone/>
-            </a:pPr>
-            <a:r>
-              <a:rPr lang="en-US" sz="900" dirty="0">
-                <a:solidFill>
-                  <a:srgbClr val="AAAAAA"/>
-                </a:solidFill>
-                <a:latin typeface="Arial" pitchFamily="34" charset="0"/>
-                <a:ea typeface="Arial" pitchFamily="34" charset="-122"/>
-                <a:cs typeface="Arial" pitchFamily="34" charset="-120"/>
-              </a:rPr>
-              <a:t>Submits tasks, receives results</a:t>
-            </a:r>
-            <a:endParaRPr lang="en-US" sz="900" dirty="0"/>
-          </a:p>
-        </p:txBody>
-      </p:sp>
-      <p:sp>
-        <p:nvSpPr>
           <p:cNvPr id="8" name="Text 6"/>
           <p:cNvSpPr/>
           <p:nvPr/>
         </p:nvSpPr>
         <p:spPr>
           <a:xfrm>
-            <a:off x="609502" y="2151608"/>
-            <a:ext cx="2590699" cy="238125"/>
+            <a:off x="2734781" y="2186558"/>
+            <a:ext cx="1070614" cy="358404"/>
           </a:xfrm>
           <a:prstGeom prst="rect">
             <a:avLst/>
@@ -5062,8 +3538,8 @@
         </p:nvSpPr>
         <p:spPr>
           <a:xfrm>
-            <a:off x="634901" y="2541984"/>
-            <a:ext cx="2539901" cy="862161"/>
+            <a:off x="634901" y="1196773"/>
+            <a:ext cx="7924302" cy="862161"/>
           </a:xfrm>
           <a:prstGeom prst="roundRect">
             <a:avLst>
@@ -5100,7 +3576,7 @@
         </p:nvSpPr>
         <p:spPr>
           <a:xfrm>
-            <a:off x="810188" y="2713434"/>
+            <a:off x="3543863" y="1368223"/>
             <a:ext cx="2189327" cy="171450"/>
           </a:xfrm>
           <a:prstGeom prst="rect">
@@ -5142,7 +3618,7 @@
         </p:nvSpPr>
         <p:spPr>
           <a:xfrm>
-            <a:off x="810188" y="2935635"/>
+            <a:off x="3543863" y="1590424"/>
             <a:ext cx="2189327" cy="297061"/>
           </a:xfrm>
           <a:prstGeom prst="rect">
@@ -5184,8 +3660,8 @@
         </p:nvSpPr>
         <p:spPr>
           <a:xfrm>
-            <a:off x="3368576" y="1285726"/>
-            <a:ext cx="2406402" cy="843111"/>
+            <a:off x="840059" y="3998050"/>
+            <a:ext cx="7560526" cy="843111"/>
           </a:xfrm>
           <a:prstGeom prst="roundRect">
             <a:avLst>
@@ -5222,7 +3698,7 @@
         </p:nvSpPr>
         <p:spPr>
           <a:xfrm>
-            <a:off x="3535482" y="1447651"/>
+            <a:off x="3445587" y="4210969"/>
             <a:ext cx="2072589" cy="171450"/>
           </a:xfrm>
           <a:prstGeom prst="rect">
@@ -5250,7 +3726,7 @@
                 <a:ea typeface="Arial" pitchFamily="34" charset="-122"/>
                 <a:cs typeface="Arial" pitchFamily="34" charset="-120"/>
               </a:rPr>
-              <a:t>Context Store</a:t>
+              <a:t>Shared Storage</a:t>
             </a:r>
             <a:endParaRPr lang="en-US" sz="1200" dirty="0"/>
           </a:p>
@@ -5264,7 +3740,7 @@
         </p:nvSpPr>
         <p:spPr>
           <a:xfrm>
-            <a:off x="3535482" y="1669852"/>
+            <a:off x="3445587" y="4433170"/>
             <a:ext cx="2072589" cy="297061"/>
           </a:xfrm>
           <a:prstGeom prst="rect">
@@ -5300,257 +3776,13 @@
       </p:sp>
       <p:sp>
         <p:nvSpPr>
-          <p:cNvPr id="15" name="Text 13"/>
-          <p:cNvSpPr/>
-          <p:nvPr/>
-        </p:nvSpPr>
-        <p:spPr>
-          <a:xfrm>
-            <a:off x="3368576" y="2255788"/>
-            <a:ext cx="2406402" cy="843111"/>
-          </a:xfrm>
-          <a:prstGeom prst="roundRect">
-            <a:avLst>
-              <a:gd name="adj" fmla="val 12051"/>
-            </a:avLst>
-          </a:prstGeom>
-          <a:solidFill>
-            <a:srgbClr val="FFFFFF">
-              <a:alpha val="6000"/>
-            </a:srgbClr>
-          </a:solidFill>
-          <a:ln w="9525">
-            <a:solidFill>
-              <a:srgbClr val="FFFFFF"/>
-            </a:solidFill>
-          </a:ln>
-        </p:spPr>
-        <p:txBody>
-          <a:bodyPr wrap="square" rtlCol="0" anchor="ctr"/>
-          <a:lstStyle/>
-          <a:p>
-            <a:pPr marL="0" indent="0">
-              <a:buNone/>
-            </a:pPr>
-            <a:endParaRPr lang="en-US" dirty="0"/>
-          </a:p>
-        </p:txBody>
-      </p:sp>
-      <p:sp>
-        <p:nvSpPr>
-          <p:cNvPr id="16" name="Text 14"/>
-          <p:cNvSpPr/>
-          <p:nvPr/>
-        </p:nvSpPr>
-        <p:spPr>
-          <a:xfrm>
-            <a:off x="3535482" y="2417713"/>
-            <a:ext cx="2072589" cy="171450"/>
-          </a:xfrm>
-          <a:prstGeom prst="rect">
-            <a:avLst/>
-          </a:prstGeom>
-          <a:noFill/>
-          <a:ln/>
-        </p:spPr>
-        <p:txBody>
-          <a:bodyPr wrap="square" lIns="0" tIns="0" rIns="0" bIns="0" rtlCol="0" anchor="t"/>
-          <a:lstStyle/>
-          <a:p>
-            <a:pPr marL="0" indent="0" algn="ctr">
-              <a:spcAft>
-                <a:spcPts val="400"/>
-              </a:spcAft>
-              <a:buNone/>
-            </a:pPr>
-            <a:r>
-              <a:rPr lang="en-US" sz="1200" b="1" dirty="0">
-                <a:solidFill>
-                  <a:srgbClr val="FFFFFF"/>
-                </a:solidFill>
-                <a:latin typeface="Arial" pitchFamily="34" charset="0"/>
-                <a:ea typeface="Arial" pitchFamily="34" charset="-122"/>
-                <a:cs typeface="Arial" pitchFamily="34" charset="-120"/>
-              </a:rPr>
-              <a:t>Task Store</a:t>
-            </a:r>
-            <a:endParaRPr lang="en-US" sz="1200" dirty="0"/>
-          </a:p>
-        </p:txBody>
-      </p:sp>
-      <p:sp>
-        <p:nvSpPr>
-          <p:cNvPr id="17" name="Text 15"/>
-          <p:cNvSpPr/>
-          <p:nvPr/>
-        </p:nvSpPr>
-        <p:spPr>
-          <a:xfrm>
-            <a:off x="3535482" y="2639913"/>
-            <a:ext cx="2072589" cy="297061"/>
-          </a:xfrm>
-          <a:prstGeom prst="rect">
-            <a:avLst/>
-          </a:prstGeom>
-          <a:noFill/>
-          <a:ln/>
-        </p:spPr>
-        <p:txBody>
-          <a:bodyPr wrap="square" lIns="0" tIns="0" rIns="0" bIns="0" rtlCol="0" anchor="t"/>
-          <a:lstStyle/>
-          <a:p>
-            <a:pPr marL="0" indent="0" algn="ctr">
-              <a:lnSpc>
-                <a:spcPts val="1170"/>
-              </a:lnSpc>
-              <a:buNone/>
-            </a:pPr>
-            <a:r>
-              <a:rPr lang="en-US" sz="900" dirty="0">
-                <a:solidFill>
-                  <a:srgbClr val="AAAAAA"/>
-                </a:solidFill>
-                <a:latin typeface="Arial" pitchFamily="34" charset="0"/>
-                <a:ea typeface="Arial" pitchFamily="34" charset="-122"/>
-                <a:cs typeface="Arial" pitchFamily="34" charset="-120"/>
-              </a:rPr>
-              <a:t>Tracks all subtasks, status, and audit trail</a:t>
-            </a:r>
-            <a:endParaRPr lang="en-US" sz="900" dirty="0"/>
-          </a:p>
-        </p:txBody>
-      </p:sp>
-      <p:sp>
-        <p:nvSpPr>
-          <p:cNvPr id="18" name="Text 16"/>
-          <p:cNvSpPr/>
-          <p:nvPr/>
-        </p:nvSpPr>
-        <p:spPr>
-          <a:xfrm>
-            <a:off x="3368576" y="3225850"/>
-            <a:ext cx="2406402" cy="843111"/>
-          </a:xfrm>
-          <a:prstGeom prst="roundRect">
-            <a:avLst>
-              <a:gd name="adj" fmla="val 12051"/>
-            </a:avLst>
-          </a:prstGeom>
-          <a:solidFill>
-            <a:srgbClr val="FFFFFF">
-              <a:alpha val="6000"/>
-            </a:srgbClr>
-          </a:solidFill>
-          <a:ln w="9525">
-            <a:solidFill>
-              <a:srgbClr val="FFFFFF"/>
-            </a:solidFill>
-          </a:ln>
-        </p:spPr>
-        <p:txBody>
-          <a:bodyPr wrap="square" rtlCol="0" anchor="ctr"/>
-          <a:lstStyle/>
-          <a:p>
-            <a:pPr marL="0" indent="0">
-              <a:buNone/>
-            </a:pPr>
-            <a:endParaRPr lang="en-US" dirty="0"/>
-          </a:p>
-        </p:txBody>
-      </p:sp>
-      <p:sp>
-        <p:nvSpPr>
-          <p:cNvPr id="19" name="Text 17"/>
-          <p:cNvSpPr/>
-          <p:nvPr/>
-        </p:nvSpPr>
-        <p:spPr>
-          <a:xfrm>
-            <a:off x="3535482" y="3387775"/>
-            <a:ext cx="2072589" cy="171450"/>
-          </a:xfrm>
-          <a:prstGeom prst="rect">
-            <a:avLst/>
-          </a:prstGeom>
-          <a:noFill/>
-          <a:ln/>
-        </p:spPr>
-        <p:txBody>
-          <a:bodyPr wrap="square" lIns="0" tIns="0" rIns="0" bIns="0" rtlCol="0" anchor="t"/>
-          <a:lstStyle/>
-          <a:p>
-            <a:pPr marL="0" indent="0" algn="ctr">
-              <a:spcAft>
-                <a:spcPts val="400"/>
-              </a:spcAft>
-              <a:buNone/>
-            </a:pPr>
-            <a:r>
-              <a:rPr lang="en-US" sz="1200" b="1" dirty="0">
-                <a:solidFill>
-                  <a:srgbClr val="FFFFFF"/>
-                </a:solidFill>
-                <a:latin typeface="Arial" pitchFamily="34" charset="0"/>
-                <a:ea typeface="Arial" pitchFamily="34" charset="-122"/>
-                <a:cs typeface="Arial" pitchFamily="34" charset="-120"/>
-              </a:rPr>
-              <a:t>Middleware Pipeline</a:t>
-            </a:r>
-            <a:endParaRPr lang="en-US" sz="1200" dirty="0"/>
-          </a:p>
-        </p:txBody>
-      </p:sp>
-      <p:sp>
-        <p:nvSpPr>
-          <p:cNvPr id="20" name="Text 18"/>
-          <p:cNvSpPr/>
-          <p:nvPr/>
-        </p:nvSpPr>
-        <p:spPr>
-          <a:xfrm>
-            <a:off x="3535482" y="3609975"/>
-            <a:ext cx="2072589" cy="297061"/>
-          </a:xfrm>
-          <a:prstGeom prst="rect">
-            <a:avLst/>
-          </a:prstGeom>
-          <a:noFill/>
-          <a:ln/>
-        </p:spPr>
-        <p:txBody>
-          <a:bodyPr wrap="square" lIns="0" tIns="0" rIns="0" bIns="0" rtlCol="0" anchor="t"/>
-          <a:lstStyle/>
-          <a:p>
-            <a:pPr marL="0" indent="0" algn="ctr">
-              <a:lnSpc>
-                <a:spcPts val="1170"/>
-              </a:lnSpc>
-              <a:buNone/>
-            </a:pPr>
-            <a:r>
-              <a:rPr lang="en-US" sz="900" dirty="0">
-                <a:solidFill>
-                  <a:srgbClr val="AAAAAA"/>
-                </a:solidFill>
-                <a:latin typeface="Arial" pitchFamily="34" charset="0"/>
-                <a:ea typeface="Arial" pitchFamily="34" charset="-122"/>
-                <a:cs typeface="Arial" pitchFamily="34" charset="-120"/>
-              </a:rPr>
-              <a:t>Permissions, logging, timing, error recovery</a:t>
-            </a:r>
-            <a:endParaRPr lang="en-US" sz="900" dirty="0"/>
-          </a:p>
-        </p:txBody>
-      </p:sp>
-      <p:sp>
-        <p:nvSpPr>
           <p:cNvPr id="21" name="Text 19"/>
           <p:cNvSpPr/>
           <p:nvPr/>
         </p:nvSpPr>
         <p:spPr>
           <a:xfrm>
-            <a:off x="5968603" y="1285726"/>
+            <a:off x="4920389" y="2595713"/>
             <a:ext cx="2539901" cy="843111"/>
           </a:xfrm>
           <a:prstGeom prst="roundRect">
@@ -5588,7 +3820,7 @@
         </p:nvSpPr>
         <p:spPr>
           <a:xfrm>
-            <a:off x="6134174" y="1447651"/>
+            <a:off x="5085960" y="2757638"/>
             <a:ext cx="2208758" cy="171450"/>
           </a:xfrm>
           <a:prstGeom prst="rect">
@@ -5630,7 +3862,7 @@
         </p:nvSpPr>
         <p:spPr>
           <a:xfrm>
-            <a:off x="6134174" y="1669852"/>
+            <a:off x="5085960" y="2979839"/>
             <a:ext cx="2208758" cy="297061"/>
           </a:xfrm>
           <a:prstGeom prst="rect">
@@ -5666,13 +3898,61 @@
       </p:sp>
       <p:sp>
         <p:nvSpPr>
-          <p:cNvPr id="24" name="Text 22"/>
-          <p:cNvSpPr/>
-          <p:nvPr/>
-        </p:nvSpPr>
-        <p:spPr>
-          <a:xfrm>
-            <a:off x="5968603" y="2560439"/>
+          <p:cNvPr id="26" name="Text 24"/>
+          <p:cNvSpPr/>
+          <p:nvPr/>
+        </p:nvSpPr>
+        <p:spPr>
+          <a:xfrm>
+            <a:off x="2273124" y="3050230"/>
+            <a:ext cx="2208758" cy="297061"/>
+          </a:xfrm>
+          <a:prstGeom prst="rect">
+            <a:avLst/>
+          </a:prstGeom>
+          <a:noFill/>
+          <a:ln/>
+        </p:spPr>
+        <p:txBody>
+          <a:bodyPr wrap="square" lIns="0" tIns="0" rIns="0" bIns="0" rtlCol="0" anchor="t"/>
+          <a:lstStyle/>
+          <a:p>
+            <a:pPr marL="0" indent="0" algn="ctr">
+              <a:lnSpc>
+                <a:spcPts val="1170"/>
+              </a:lnSpc>
+              <a:buNone/>
+            </a:pPr>
+            <a:r>
+              <a:rPr lang="en-US" sz="900" dirty="0">
+                <a:solidFill>
+                  <a:srgbClr val="AAAAAA"/>
+                </a:solidFill>
+                <a:latin typeface="Arial" pitchFamily="34" charset="0"/>
+                <a:ea typeface="Arial" pitchFamily="34" charset="-122"/>
+                <a:cs typeface="Arial" pitchFamily="34" charset="-120"/>
+              </a:rPr>
+              <a:t>Full write access. Implements features, fixes bugs, modifies code.</a:t>
+            </a:r>
+            <a:endParaRPr lang="en-US" sz="900" dirty="0"/>
+          </a:p>
+        </p:txBody>
+      </p:sp>
+      <p:sp>
+        <p:nvSpPr>
+          <p:cNvPr id="30" name="Text 19">
+            <a:extLst>
+              <a:ext uri="{FF2B5EF4-FFF2-40B4-BE49-F238E27FC236}">
+                <a16:creationId xmlns:a16="http://schemas.microsoft.com/office/drawing/2014/main" id="{5628A439-081C-F924-0751-B3F0048B8202}"/>
+              </a:ext>
+            </a:extLst>
+          </p:cNvPr>
+          <p:cNvSpPr/>
+          <p:nvPr/>
+        </p:nvSpPr>
+        <p:spPr>
+          <a:xfrm>
+            <a:off x="2032099" y="2595713"/>
             <a:ext cx="2539901" cy="843111"/>
           </a:xfrm>
           <a:prstGeom prst="roundRect">
@@ -5681,13 +3961,13 @@
             </a:avLst>
           </a:prstGeom>
           <a:solidFill>
-            <a:srgbClr val="B165FB">
-              <a:alpha val="10000"/>
+            <a:srgbClr val="40695B">
+              <a:alpha val="15000"/>
             </a:srgbClr>
           </a:solidFill>
           <a:ln w="9525">
             <a:solidFill>
-              <a:srgbClr val="B165FB"/>
+              <a:srgbClr val="40695B"/>
             </a:solidFill>
           </a:ln>
         </p:spPr>
@@ -5704,13 +3984,19 @@
       </p:sp>
       <p:sp>
         <p:nvSpPr>
-          <p:cNvPr id="25" name="Text 23"/>
-          <p:cNvSpPr/>
-          <p:nvPr/>
-        </p:nvSpPr>
-        <p:spPr>
-          <a:xfrm>
-            <a:off x="6134174" y="2722364"/>
+          <p:cNvPr id="31" name="Text 20">
+            <a:extLst>
+              <a:ext uri="{FF2B5EF4-FFF2-40B4-BE49-F238E27FC236}">
+                <a16:creationId xmlns:a16="http://schemas.microsoft.com/office/drawing/2014/main" id="{0F3AF5CC-B11D-7FF3-B3FD-8EB56255F85A}"/>
+              </a:ext>
+            </a:extLst>
+          </p:cNvPr>
+          <p:cNvSpPr/>
+          <p:nvPr/>
+        </p:nvSpPr>
+        <p:spPr>
+          <a:xfrm>
+            <a:off x="2197670" y="2757638"/>
             <a:ext cx="2208758" cy="171450"/>
           </a:xfrm>
           <a:prstGeom prst="rect">
@@ -5732,28 +4018,84 @@
             <a:r>
               <a:rPr lang="en-US" sz="1200" b="1" dirty="0">
                 <a:solidFill>
+                  <a:srgbClr val="40695B"/>
+                </a:solidFill>
+                <a:latin typeface="Arial" pitchFamily="34" charset="0"/>
+                <a:ea typeface="Arial" pitchFamily="34" charset="-122"/>
+                <a:cs typeface="Arial" pitchFamily="34" charset="-120"/>
+              </a:rPr>
+              <a:t>Coder Agent</a:t>
+            </a:r>
+          </a:p>
+        </p:txBody>
+      </p:sp>
+      <p:sp>
+        <p:nvSpPr>
+          <p:cNvPr id="33" name="Text 6">
+            <a:extLst>
+              <a:ext uri="{FF2B5EF4-FFF2-40B4-BE49-F238E27FC236}">
+                <a16:creationId xmlns:a16="http://schemas.microsoft.com/office/drawing/2014/main" id="{BD37B6A0-B75F-5356-5A44-0DCDD5F1159A}"/>
+              </a:ext>
+            </a:extLst>
+          </p:cNvPr>
+          <p:cNvSpPr/>
+          <p:nvPr/>
+        </p:nvSpPr>
+        <p:spPr>
+          <a:xfrm>
+            <a:off x="5733190" y="2194657"/>
+            <a:ext cx="1070614" cy="358404"/>
+          </a:xfrm>
+          <a:prstGeom prst="rect">
+            <a:avLst/>
+          </a:prstGeom>
+          <a:noFill/>
+          <a:ln/>
+        </p:spPr>
+        <p:txBody>
+          <a:bodyPr wrap="square" lIns="0" tIns="0" rIns="0" bIns="0" rtlCol="0" anchor="t"/>
+          <a:lstStyle/>
+          <a:p>
+            <a:pPr marL="0" indent="0" algn="ctr">
+              <a:spcBef>
+                <a:spcPts val="200"/>
+              </a:spcBef>
+              <a:spcAft>
+                <a:spcPts val="200"/>
+              </a:spcAft>
+              <a:buNone/>
+            </a:pPr>
+            <a:r>
+              <a:rPr lang="en-US" sz="1600" dirty="0">
+                <a:solidFill>
                   <a:srgbClr val="B165FB"/>
                 </a:solidFill>
                 <a:latin typeface="Arial" pitchFamily="34" charset="0"/>
                 <a:ea typeface="Arial" pitchFamily="34" charset="-122"/>
                 <a:cs typeface="Arial" pitchFamily="34" charset="-120"/>
               </a:rPr>
-              <a:t>Coder Agent</a:t>
-            </a:r>
-            <a:endParaRPr lang="en-US" sz="1200" dirty="0"/>
-          </a:p>
-        </p:txBody>
-      </p:sp>
-      <p:sp>
-        <p:nvSpPr>
-          <p:cNvPr id="26" name="Text 24"/>
-          <p:cNvSpPr/>
-          <p:nvPr/>
-        </p:nvSpPr>
-        <p:spPr>
-          <a:xfrm>
-            <a:off x="6134174" y="2944564"/>
-            <a:ext cx="2208758" cy="297061"/>
+              <a:t>↓</a:t>
+            </a:r>
+            <a:endParaRPr lang="en-US" sz="1600" dirty="0"/>
+          </a:p>
+        </p:txBody>
+      </p:sp>
+      <p:sp>
+        <p:nvSpPr>
+          <p:cNvPr id="34" name="Text 6">
+            <a:extLst>
+              <a:ext uri="{FF2B5EF4-FFF2-40B4-BE49-F238E27FC236}">
+                <a16:creationId xmlns:a16="http://schemas.microsoft.com/office/drawing/2014/main" id="{020E0844-34CB-646C-CF56-8FA324F38352}"/>
+              </a:ext>
+            </a:extLst>
+          </p:cNvPr>
+          <p:cNvSpPr/>
+          <p:nvPr/>
+        </p:nvSpPr>
+        <p:spPr>
+          <a:xfrm>
+            <a:off x="5655032" y="3497913"/>
+            <a:ext cx="1070614" cy="358404"/>
           </a:xfrm>
           <a:prstGeom prst="rect">
             <a:avLst/>
@@ -5766,23 +4108,128 @@
           <a:lstStyle/>
           <a:p>
             <a:pPr marL="0" indent="0" algn="ctr">
-              <a:lnSpc>
-                <a:spcPts val="1170"/>
-              </a:lnSpc>
-              <a:buNone/>
-            </a:pPr>
-            <a:r>
-              <a:rPr lang="en-US" sz="900" dirty="0">
-                <a:solidFill>
-                  <a:srgbClr val="AAAAAA"/>
-                </a:solidFill>
-                <a:latin typeface="Arial" pitchFamily="34" charset="0"/>
-                <a:ea typeface="Arial" pitchFamily="34" charset="-122"/>
-                <a:cs typeface="Arial" pitchFamily="34" charset="-120"/>
-              </a:rPr>
-              <a:t>Full write access. Implements features, fixes bugs, modifies code.</a:t>
-            </a:r>
-            <a:endParaRPr lang="en-US" sz="900" dirty="0"/>
+              <a:spcBef>
+                <a:spcPts val="200"/>
+              </a:spcBef>
+              <a:spcAft>
+                <a:spcPts val="200"/>
+              </a:spcAft>
+              <a:buNone/>
+            </a:pPr>
+            <a:r>
+              <a:rPr lang="en-US" sz="1600" dirty="0">
+                <a:solidFill>
+                  <a:srgbClr val="B165FB"/>
+                </a:solidFill>
+                <a:latin typeface="Arial" pitchFamily="34" charset="0"/>
+                <a:ea typeface="Arial" pitchFamily="34" charset="-122"/>
+                <a:cs typeface="Arial" pitchFamily="34" charset="-120"/>
+              </a:rPr>
+              <a:t>↓</a:t>
+            </a:r>
+            <a:endParaRPr lang="en-US" sz="1600" dirty="0"/>
+          </a:p>
+        </p:txBody>
+      </p:sp>
+      <p:sp>
+        <p:nvSpPr>
+          <p:cNvPr id="35" name="Text 6">
+            <a:extLst>
+              <a:ext uri="{FF2B5EF4-FFF2-40B4-BE49-F238E27FC236}">
+                <a16:creationId xmlns:a16="http://schemas.microsoft.com/office/drawing/2014/main" id="{96C54C48-5E92-6C59-2193-5403524F7003}"/>
+              </a:ext>
+            </a:extLst>
+          </p:cNvPr>
+          <p:cNvSpPr/>
+          <p:nvPr/>
+        </p:nvSpPr>
+        <p:spPr>
+          <a:xfrm>
+            <a:off x="2766742" y="3479657"/>
+            <a:ext cx="1070614" cy="358404"/>
+          </a:xfrm>
+          <a:prstGeom prst="rect">
+            <a:avLst/>
+          </a:prstGeom>
+          <a:noFill/>
+          <a:ln/>
+        </p:spPr>
+        <p:txBody>
+          <a:bodyPr wrap="square" lIns="0" tIns="0" rIns="0" bIns="0" rtlCol="0" anchor="t"/>
+          <a:lstStyle/>
+          <a:p>
+            <a:pPr marL="0" indent="0" algn="ctr">
+              <a:spcBef>
+                <a:spcPts val="200"/>
+              </a:spcBef>
+              <a:spcAft>
+                <a:spcPts val="200"/>
+              </a:spcAft>
+              <a:buNone/>
+            </a:pPr>
+            <a:r>
+              <a:rPr lang="en-US" sz="1600" dirty="0">
+                <a:solidFill>
+                  <a:srgbClr val="B165FB"/>
+                </a:solidFill>
+                <a:latin typeface="Arial" pitchFamily="34" charset="0"/>
+                <a:ea typeface="Arial" pitchFamily="34" charset="-122"/>
+                <a:cs typeface="Arial" pitchFamily="34" charset="-120"/>
+              </a:rPr>
+              <a:t>↓</a:t>
+            </a:r>
+            <a:endParaRPr lang="en-US" sz="1600" dirty="0"/>
+          </a:p>
+        </p:txBody>
+      </p:sp>
+      <p:sp>
+        <p:nvSpPr>
+          <p:cNvPr id="36" name="Text 6">
+            <a:extLst>
+              <a:ext uri="{FF2B5EF4-FFF2-40B4-BE49-F238E27FC236}">
+                <a16:creationId xmlns:a16="http://schemas.microsoft.com/office/drawing/2014/main" id="{40C8CDE3-8974-962D-9683-E4BC0932F9BB}"/>
+              </a:ext>
+            </a:extLst>
+          </p:cNvPr>
+          <p:cNvSpPr/>
+          <p:nvPr/>
+        </p:nvSpPr>
+        <p:spPr>
+          <a:xfrm>
+            <a:off x="480594" y="2571750"/>
+            <a:ext cx="1070614" cy="624720"/>
+          </a:xfrm>
+          <a:prstGeom prst="rect">
+            <a:avLst/>
+          </a:prstGeom>
+          <a:noFill/>
+          <a:ln/>
+        </p:spPr>
+        <p:txBody>
+          <a:bodyPr wrap="square" lIns="0" tIns="0" rIns="0" bIns="0" rtlCol="0" anchor="t"/>
+          <a:lstStyle/>
+          <a:p>
+            <a:pPr marL="0" indent="0" algn="ctr">
+              <a:spcBef>
+                <a:spcPts val="200"/>
+              </a:spcBef>
+              <a:spcAft>
+                <a:spcPts val="200"/>
+              </a:spcAft>
+              <a:buNone/>
+            </a:pPr>
+            <a:r>
+              <a:rPr lang="en-US" sz="3200" dirty="0">
+                <a:solidFill>
+                  <a:srgbClr val="B165FB"/>
+                </a:solidFill>
+                <a:latin typeface="Arial" pitchFamily="34" charset="0"/>
+                <a:ea typeface="Arial" pitchFamily="34" charset="-122"/>
+                <a:cs typeface="Arial" pitchFamily="34" charset="-120"/>
+              </a:rPr>
+              <a:t>↓</a:t>
+            </a:r>
+            <a:endParaRPr lang="en-US" sz="3200" dirty="0"/>
           </a:p>
         </p:txBody>
       </p:sp>
@@ -6560,7 +5007,7 @@
                 <a:ea typeface="Courier New" pitchFamily="34" charset="-122"/>
                 <a:cs typeface="Courier New" pitchFamily="34" charset="-120"/>
               </a:rPr>
-              <a:t>def _core_turn(self, ctx):</a:t>
+              <a:t>  def _core_turn(self, ctx):</a:t>
             </a:r>
             <a:endParaRPr lang="en-US" sz="850" dirty="0"/>
           </a:p>
@@ -6602,7 +5049,7 @@
                 <a:ea typeface="Courier New" pitchFamily="34" charset="-122"/>
                 <a:cs typeface="Courier New" pitchFamily="34" charset="-120"/>
               </a:rPr>
-              <a:t>msg = session_history.to_prompt()</a:t>
+              <a:t>     msg = session_history.to_prompt()</a:t>
             </a:r>
             <a:endParaRPr lang="en-US" sz="850" dirty="0"/>
           </a:p>
@@ -6616,7 +5063,7 @@
         </p:nvSpPr>
         <p:spPr>
           <a:xfrm>
-            <a:off x="4759077" y="1720304"/>
+            <a:off x="5108481" y="1720304"/>
             <a:ext cx="3478149" cy="114300"/>
           </a:xfrm>
           <a:prstGeom prst="rect">
@@ -6658,7 +5105,7 @@
         </p:nvSpPr>
         <p:spPr>
           <a:xfrm>
-            <a:off x="4759077" y="1859905"/>
+            <a:off x="5108481" y="1859905"/>
             <a:ext cx="3478149" cy="114300"/>
           </a:xfrm>
           <a:prstGeom prst="rect">
@@ -6700,7 +5147,7 @@
         </p:nvSpPr>
         <p:spPr>
           <a:xfrm>
-            <a:off x="4759077" y="1999506"/>
+            <a:off x="5108481" y="1999506"/>
             <a:ext cx="3478149" cy="114300"/>
           </a:xfrm>
           <a:prstGeom prst="rect">
@@ -6742,7 +5189,7 @@
         </p:nvSpPr>
         <p:spPr>
           <a:xfrm>
-            <a:off x="4759077" y="2139107"/>
+            <a:off x="4901012" y="2132707"/>
             <a:ext cx="3478149" cy="114300"/>
           </a:xfrm>
           <a:prstGeom prst="rect">
@@ -6784,7 +5231,7 @@
         </p:nvSpPr>
         <p:spPr>
           <a:xfrm>
-            <a:off x="4759077" y="2278707"/>
+            <a:off x="5108481" y="2278707"/>
             <a:ext cx="3478149" cy="114300"/>
           </a:xfrm>
           <a:prstGeom prst="rect">
@@ -6826,7 +5273,7 @@
         </p:nvSpPr>
         <p:spPr>
           <a:xfrm>
-            <a:off x="4759077" y="2418308"/>
+            <a:off x="5108481" y="2418308"/>
             <a:ext cx="3478149" cy="114300"/>
           </a:xfrm>
           <a:prstGeom prst="rect">
@@ -6868,7 +5315,7 @@
         </p:nvSpPr>
         <p:spPr>
           <a:xfrm>
-            <a:off x="4759077" y="2557909"/>
+            <a:off x="5108481" y="2557909"/>
             <a:ext cx="3478149" cy="114300"/>
           </a:xfrm>
           <a:prstGeom prst="rect">
@@ -9755,1646 +8202,6 @@
 
 <file path=ppt/slides/slide7.xml><?xml version="1.0" encoding="utf-8"?>
 <p:sld xmlns:a="http://schemas.openxmlformats.org/drawingml/2006/main" xmlns:r="http://schemas.openxmlformats.org/officeDocument/2006/relationships" xmlns:p="http://schemas.openxmlformats.org/presentationml/2006/main">
-  <p:cSld name="Slide 7">
-    <p:bg>
-      <p:bgPr>
-        <a:solidFill>
-          <a:srgbClr val="181B24"/>
-        </a:solidFill>
-        <a:effectLst/>
-      </p:bgPr>
-    </p:bg>
-    <p:spTree>
-      <p:nvGrpSpPr>
-        <p:cNvPr id="1" name=""/>
-        <p:cNvGrpSpPr/>
-        <p:nvPr/>
-      </p:nvGrpSpPr>
-      <p:grpSpPr>
-        <a:xfrm>
-          <a:off x="0" y="0"/>
-          <a:ext cx="0" cy="0"/>
-          <a:chOff x="0" y="0"/>
-          <a:chExt cx="0" cy="0"/>
-        </a:xfrm>
-      </p:grpSpPr>
-      <p:sp>
-        <p:nvSpPr>
-          <p:cNvPr id="2" name="Text 0"/>
-          <p:cNvSpPr/>
-          <p:nvPr/>
-        </p:nvSpPr>
-        <p:spPr>
-          <a:xfrm>
-            <a:off x="0" y="0"/>
-            <a:ext cx="9144000" cy="50750"/>
-          </a:xfrm>
-          <a:prstGeom prst="rect">
-            <a:avLst/>
-          </a:prstGeom>
-          <a:solidFill>
-            <a:srgbClr val="B165FB"/>
-          </a:solidFill>
-          <a:ln/>
-        </p:spPr>
-        <p:txBody>
-          <a:bodyPr wrap="square" rtlCol="0" anchor="ctr"/>
-          <a:lstStyle/>
-          <a:p>
-            <a:pPr marL="0" indent="0">
-              <a:buNone/>
-            </a:pPr>
-            <a:endParaRPr lang="en-US" dirty="0"/>
-          </a:p>
-        </p:txBody>
-      </p:sp>
-      <p:sp>
-        <p:nvSpPr>
-          <p:cNvPr id="3" name="Text 1"/>
-          <p:cNvSpPr/>
-          <p:nvPr/>
-        </p:nvSpPr>
-        <p:spPr>
-          <a:xfrm>
-            <a:off x="634901" y="330101"/>
-            <a:ext cx="8031379" cy="371475"/>
-          </a:xfrm>
-          <a:prstGeom prst="rect">
-            <a:avLst/>
-          </a:prstGeom>
-          <a:noFill/>
-          <a:ln/>
-        </p:spPr>
-        <p:txBody>
-          <a:bodyPr wrap="square" lIns="0" tIns="0" rIns="0" bIns="0" rtlCol="0" anchor="t"/>
-          <a:lstStyle/>
-          <a:p>
-            <a:pPr marL="0" indent="0" algn="l">
-              <a:spcAft>
-                <a:spcPts val="400"/>
-              </a:spcAft>
-              <a:buNone/>
-            </a:pPr>
-            <a:r>
-              <a:rPr lang="en-US" sz="2600" b="1" dirty="0">
-                <a:solidFill>
-                  <a:srgbClr val="B165FB"/>
-                </a:solidFill>
-                <a:latin typeface="Arial" pitchFamily="34" charset="0"/>
-                <a:ea typeface="Arial" pitchFamily="34" charset="-122"/>
-                <a:cs typeface="Arial" pitchFamily="34" charset="-120"/>
-              </a:rPr>
-              <a:t>Middleware Pipeline</a:t>
-            </a:r>
-            <a:endParaRPr lang="en-US" sz="2600" dirty="0"/>
-          </a:p>
-        </p:txBody>
-      </p:sp>
-      <p:sp>
-        <p:nvSpPr>
-          <p:cNvPr id="4" name="Text 2"/>
-          <p:cNvSpPr/>
-          <p:nvPr/>
-        </p:nvSpPr>
-        <p:spPr>
-          <a:xfrm>
-            <a:off x="634901" y="752326"/>
-            <a:ext cx="762000" cy="38100"/>
-          </a:xfrm>
-          <a:prstGeom prst="rect">
-            <a:avLst/>
-          </a:prstGeom>
-          <a:solidFill>
-            <a:srgbClr val="40695B"/>
-          </a:solidFill>
-          <a:ln/>
-        </p:spPr>
-        <p:txBody>
-          <a:bodyPr wrap="square" rtlCol="0" anchor="ctr"/>
-          <a:lstStyle/>
-          <a:p>
-            <a:pPr marL="0" indent="0">
-              <a:buNone/>
-            </a:pPr>
-            <a:endParaRPr lang="en-US" dirty="0"/>
-          </a:p>
-        </p:txBody>
-      </p:sp>
-      <p:sp>
-        <p:nvSpPr>
-          <p:cNvPr id="5" name="Text 3"/>
-          <p:cNvSpPr/>
-          <p:nvPr/>
-        </p:nvSpPr>
-        <p:spPr>
-          <a:xfrm>
-            <a:off x="634901" y="891927"/>
-            <a:ext cx="8031379" cy="346472"/>
-          </a:xfrm>
-          <a:prstGeom prst="rect">
-            <a:avLst/>
-          </a:prstGeom>
-          <a:noFill/>
-          <a:ln/>
-        </p:spPr>
-        <p:txBody>
-          <a:bodyPr wrap="square" lIns="0" tIns="0" rIns="0" bIns="0" rtlCol="0" anchor="t"/>
-          <a:lstStyle/>
-          <a:p>
-            <a:pPr marL="0" indent="0" algn="l">
-              <a:lnSpc>
-                <a:spcPts val="1365"/>
-              </a:lnSpc>
-              <a:spcAft>
-                <a:spcPts val="800"/>
-              </a:spcAft>
-              <a:buNone/>
-            </a:pPr>
-            <a:r>
-              <a:rPr lang="en-US" sz="1050" dirty="0">
-                <a:solidFill>
-                  <a:srgbClr val="CCCCCC"/>
-                </a:solidFill>
-                <a:latin typeface="Arial" pitchFamily="34" charset="0"/>
-                <a:ea typeface="Arial" pitchFamily="34" charset="-122"/>
-                <a:cs typeface="Arial" pitchFamily="34" charset="-120"/>
-              </a:rPr>
-              <a:t>The middleware pipeline separates cross-cutting concerns from core logic. Before hooks run in order; after hooks unwind in reverse (chain-of-responsibility pattern).</a:t>
-            </a:r>
-            <a:endParaRPr lang="en-US" sz="1050" dirty="0"/>
-          </a:p>
-        </p:txBody>
-      </p:sp>
-      <p:sp>
-        <p:nvSpPr>
-          <p:cNvPr id="6" name="Text 4"/>
-          <p:cNvSpPr/>
-          <p:nvPr/>
-        </p:nvSpPr>
-        <p:spPr>
-          <a:xfrm>
-            <a:off x="634901" y="1339900"/>
-            <a:ext cx="2539901" cy="323850"/>
-          </a:xfrm>
-          <a:prstGeom prst="roundRect">
-            <a:avLst>
-              <a:gd name="adj" fmla="val 23529"/>
-            </a:avLst>
-          </a:prstGeom>
-          <a:solidFill>
-            <a:srgbClr val="FFFFFF">
-              <a:alpha val="4000"/>
-            </a:srgbClr>
-          </a:solidFill>
-          <a:ln w="9525">
-            <a:solidFill>
-              <a:srgbClr val="B165FB"/>
-            </a:solidFill>
-          </a:ln>
-        </p:spPr>
-        <p:txBody>
-          <a:bodyPr wrap="square" rtlCol="0" anchor="ctr"/>
-          <a:lstStyle/>
-          <a:p>
-            <a:pPr marL="0" indent="0">
-              <a:buNone/>
-            </a:pPr>
-            <a:endParaRPr lang="en-US" dirty="0"/>
-          </a:p>
-        </p:txBody>
-      </p:sp>
-      <p:sp>
-        <p:nvSpPr>
-          <p:cNvPr id="7" name="Text 5"/>
-          <p:cNvSpPr/>
-          <p:nvPr/>
-        </p:nvSpPr>
-        <p:spPr>
-          <a:xfrm>
-            <a:off x="771376" y="1451074"/>
-            <a:ext cx="101501" cy="101501"/>
-          </a:xfrm>
-          <a:prstGeom prst="roundRect">
-            <a:avLst>
-              <a:gd name="adj" fmla="val 900878"/>
-            </a:avLst>
-          </a:prstGeom>
-          <a:solidFill>
-            <a:srgbClr val="B165FB"/>
-          </a:solidFill>
-          <a:ln/>
-        </p:spPr>
-        <p:txBody>
-          <a:bodyPr wrap="square" rtlCol="0" anchor="ctr"/>
-          <a:lstStyle/>
-          <a:p>
-            <a:pPr marL="0" indent="0">
-              <a:buNone/>
-            </a:pPr>
-            <a:endParaRPr lang="en-US" dirty="0"/>
-          </a:p>
-        </p:txBody>
-      </p:sp>
-      <p:sp>
-        <p:nvSpPr>
-          <p:cNvPr id="8" name="Text 6"/>
-          <p:cNvSpPr/>
-          <p:nvPr/>
-        </p:nvSpPr>
-        <p:spPr>
-          <a:xfrm>
-            <a:off x="974378" y="1425625"/>
-            <a:ext cx="1088591" cy="152400"/>
-          </a:xfrm>
-          <a:prstGeom prst="rect">
-            <a:avLst/>
-          </a:prstGeom>
-          <a:noFill/>
-          <a:ln/>
-        </p:spPr>
-        <p:txBody>
-          <a:bodyPr wrap="square" lIns="0" tIns="0" rIns="0" bIns="0" rtlCol="0" anchor="t"/>
-          <a:lstStyle/>
-          <a:p>
-            <a:pPr marL="0" indent="0" algn="l">
-              <a:buNone/>
-            </a:pPr>
-            <a:r>
-              <a:rPr lang="en-US" sz="1050" dirty="0">
-                <a:solidFill>
-                  <a:srgbClr val="CCCCCC"/>
-                </a:solidFill>
-                <a:latin typeface="Arial" pitchFamily="34" charset="0"/>
-                <a:ea typeface="Arial" pitchFamily="34" charset="-122"/>
-                <a:cs typeface="Arial" pitchFamily="34" charset="-120"/>
-              </a:rPr>
-              <a:t>Permission Guard</a:t>
-            </a:r>
-            <a:endParaRPr lang="en-US" sz="1050" dirty="0"/>
-          </a:p>
-        </p:txBody>
-      </p:sp>
-      <p:sp>
-        <p:nvSpPr>
-          <p:cNvPr id="9" name="Text 7"/>
-          <p:cNvSpPr/>
-          <p:nvPr/>
-        </p:nvSpPr>
-        <p:spPr>
-          <a:xfrm>
-            <a:off x="634901" y="1727150"/>
-            <a:ext cx="2539901" cy="323850"/>
-          </a:xfrm>
-          <a:prstGeom prst="roundRect">
-            <a:avLst>
-              <a:gd name="adj" fmla="val 23529"/>
-            </a:avLst>
-          </a:prstGeom>
-          <a:solidFill>
-            <a:srgbClr val="FFFFFF">
-              <a:alpha val="4000"/>
-            </a:srgbClr>
-          </a:solidFill>
-          <a:ln w="9525">
-            <a:solidFill>
-              <a:srgbClr val="B165FB"/>
-            </a:solidFill>
-          </a:ln>
-        </p:spPr>
-        <p:txBody>
-          <a:bodyPr wrap="square" rtlCol="0" anchor="ctr"/>
-          <a:lstStyle/>
-          <a:p>
-            <a:pPr marL="0" indent="0">
-              <a:buNone/>
-            </a:pPr>
-            <a:endParaRPr lang="en-US" dirty="0"/>
-          </a:p>
-        </p:txBody>
-      </p:sp>
-      <p:sp>
-        <p:nvSpPr>
-          <p:cNvPr id="10" name="Text 8"/>
-          <p:cNvSpPr/>
-          <p:nvPr/>
-        </p:nvSpPr>
-        <p:spPr>
-          <a:xfrm>
-            <a:off x="771376" y="1838325"/>
-            <a:ext cx="101501" cy="101501"/>
-          </a:xfrm>
-          <a:prstGeom prst="roundRect">
-            <a:avLst>
-              <a:gd name="adj" fmla="val 900878"/>
-            </a:avLst>
-          </a:prstGeom>
-          <a:solidFill>
-            <a:srgbClr val="B165FB"/>
-          </a:solidFill>
-          <a:ln/>
-        </p:spPr>
-        <p:txBody>
-          <a:bodyPr wrap="square" rtlCol="0" anchor="ctr"/>
-          <a:lstStyle/>
-          <a:p>
-            <a:pPr marL="0" indent="0">
-              <a:buNone/>
-            </a:pPr>
-            <a:endParaRPr lang="en-US" dirty="0"/>
-          </a:p>
-        </p:txBody>
-      </p:sp>
-      <p:sp>
-        <p:nvSpPr>
-          <p:cNvPr id="11" name="Text 9"/>
-          <p:cNvSpPr/>
-          <p:nvPr/>
-        </p:nvSpPr>
-        <p:spPr>
-          <a:xfrm>
-            <a:off x="974378" y="1812875"/>
-            <a:ext cx="831890" cy="152400"/>
-          </a:xfrm>
-          <a:prstGeom prst="rect">
-            <a:avLst/>
-          </a:prstGeom>
-          <a:noFill/>
-          <a:ln/>
-        </p:spPr>
-        <p:txBody>
-          <a:bodyPr wrap="square" lIns="0" tIns="0" rIns="0" bIns="0" rtlCol="0" anchor="t"/>
-          <a:lstStyle/>
-          <a:p>
-            <a:pPr marL="0" indent="0" algn="l">
-              <a:buNone/>
-            </a:pPr>
-            <a:r>
-              <a:rPr lang="en-US" sz="1050" dirty="0">
-                <a:solidFill>
-                  <a:srgbClr val="CCCCCC"/>
-                </a:solidFill>
-                <a:latin typeface="Arial" pitchFamily="34" charset="0"/>
-                <a:ea typeface="Arial" pitchFamily="34" charset="-122"/>
-                <a:cs typeface="Arial" pitchFamily="34" charset="-120"/>
-              </a:rPr>
-              <a:t>Token Budget</a:t>
-            </a:r>
-            <a:endParaRPr lang="en-US" sz="1050" dirty="0"/>
-          </a:p>
-        </p:txBody>
-      </p:sp>
-      <p:sp>
-        <p:nvSpPr>
-          <p:cNvPr id="12" name="Text 10"/>
-          <p:cNvSpPr/>
-          <p:nvPr/>
-        </p:nvSpPr>
-        <p:spPr>
-          <a:xfrm>
-            <a:off x="634901" y="2114401"/>
-            <a:ext cx="2539901" cy="323850"/>
-          </a:xfrm>
-          <a:prstGeom prst="roundRect">
-            <a:avLst>
-              <a:gd name="adj" fmla="val 23529"/>
-            </a:avLst>
-          </a:prstGeom>
-          <a:solidFill>
-            <a:srgbClr val="FFFFFF">
-              <a:alpha val="4000"/>
-            </a:srgbClr>
-          </a:solidFill>
-          <a:ln w="9525">
-            <a:solidFill>
-              <a:srgbClr val="B165FB"/>
-            </a:solidFill>
-          </a:ln>
-        </p:spPr>
-        <p:txBody>
-          <a:bodyPr wrap="square" rtlCol="0" anchor="ctr"/>
-          <a:lstStyle/>
-          <a:p>
-            <a:pPr marL="0" indent="0">
-              <a:buNone/>
-            </a:pPr>
-            <a:endParaRPr lang="en-US" dirty="0"/>
-          </a:p>
-        </p:txBody>
-      </p:sp>
-      <p:sp>
-        <p:nvSpPr>
-          <p:cNvPr id="13" name="Text 11"/>
-          <p:cNvSpPr/>
-          <p:nvPr/>
-        </p:nvSpPr>
-        <p:spPr>
-          <a:xfrm>
-            <a:off x="771376" y="2225576"/>
-            <a:ext cx="101501" cy="101501"/>
-          </a:xfrm>
-          <a:prstGeom prst="roundRect">
-            <a:avLst>
-              <a:gd name="adj" fmla="val 900878"/>
-            </a:avLst>
-          </a:prstGeom>
-          <a:solidFill>
-            <a:srgbClr val="B165FB"/>
-          </a:solidFill>
-          <a:ln/>
-        </p:spPr>
-        <p:txBody>
-          <a:bodyPr wrap="square" rtlCol="0" anchor="ctr"/>
-          <a:lstStyle/>
-          <a:p>
-            <a:pPr marL="0" indent="0">
-              <a:buNone/>
-            </a:pPr>
-            <a:endParaRPr lang="en-US" dirty="0"/>
-          </a:p>
-        </p:txBody>
-      </p:sp>
-      <p:sp>
-        <p:nvSpPr>
-          <p:cNvPr id="14" name="Text 12"/>
-          <p:cNvSpPr/>
-          <p:nvPr/>
-        </p:nvSpPr>
-        <p:spPr>
-          <a:xfrm>
-            <a:off x="974378" y="2200126"/>
-            <a:ext cx="1081305" cy="152400"/>
-          </a:xfrm>
-          <a:prstGeom prst="rect">
-            <a:avLst/>
-          </a:prstGeom>
-          <a:noFill/>
-          <a:ln/>
-        </p:spPr>
-        <p:txBody>
-          <a:bodyPr wrap="square" lIns="0" tIns="0" rIns="0" bIns="0" rtlCol="0" anchor="t"/>
-          <a:lstStyle/>
-          <a:p>
-            <a:pPr marL="0" indent="0" algn="l">
-              <a:buNone/>
-            </a:pPr>
-            <a:r>
-              <a:rPr lang="en-US" sz="1050" dirty="0">
-                <a:solidFill>
-                  <a:srgbClr val="CCCCCC"/>
-                </a:solidFill>
-                <a:latin typeface="Arial" pitchFamily="34" charset="0"/>
-                <a:ea typeface="Arial" pitchFamily="34" charset="-122"/>
-                <a:cs typeface="Arial" pitchFamily="34" charset="-120"/>
-              </a:rPr>
-              <a:t>Output Truncation</a:t>
-            </a:r>
-            <a:endParaRPr lang="en-US" sz="1050" dirty="0"/>
-          </a:p>
-        </p:txBody>
-      </p:sp>
-      <p:sp>
-        <p:nvSpPr>
-          <p:cNvPr id="15" name="Text 13"/>
-          <p:cNvSpPr/>
-          <p:nvPr/>
-        </p:nvSpPr>
-        <p:spPr>
-          <a:xfrm>
-            <a:off x="634901" y="2501652"/>
-            <a:ext cx="2539901" cy="323850"/>
-          </a:xfrm>
-          <a:prstGeom prst="roundRect">
-            <a:avLst>
-              <a:gd name="adj" fmla="val 23529"/>
-            </a:avLst>
-          </a:prstGeom>
-          <a:solidFill>
-            <a:srgbClr val="FFFFFF">
-              <a:alpha val="4000"/>
-            </a:srgbClr>
-          </a:solidFill>
-          <a:ln w="9525">
-            <a:solidFill>
-              <a:srgbClr val="B165FB"/>
-            </a:solidFill>
-          </a:ln>
-        </p:spPr>
-        <p:txBody>
-          <a:bodyPr wrap="square" rtlCol="0" anchor="ctr"/>
-          <a:lstStyle/>
-          <a:p>
-            <a:pPr marL="0" indent="0">
-              <a:buNone/>
-            </a:pPr>
-            <a:endParaRPr lang="en-US" dirty="0"/>
-          </a:p>
-        </p:txBody>
-      </p:sp>
-      <p:sp>
-        <p:nvSpPr>
-          <p:cNvPr id="16" name="Text 14"/>
-          <p:cNvSpPr/>
-          <p:nvPr/>
-        </p:nvSpPr>
-        <p:spPr>
-          <a:xfrm>
-            <a:off x="771376" y="2612827"/>
-            <a:ext cx="101501" cy="101501"/>
-          </a:xfrm>
-          <a:prstGeom prst="roundRect">
-            <a:avLst>
-              <a:gd name="adj" fmla="val 900878"/>
-            </a:avLst>
-          </a:prstGeom>
-          <a:solidFill>
-            <a:srgbClr val="40695B"/>
-          </a:solidFill>
-          <a:ln/>
-        </p:spPr>
-        <p:txBody>
-          <a:bodyPr wrap="square" rtlCol="0" anchor="ctr"/>
-          <a:lstStyle/>
-          <a:p>
-            <a:pPr marL="0" indent="0">
-              <a:buNone/>
-            </a:pPr>
-            <a:endParaRPr lang="en-US" dirty="0"/>
-          </a:p>
-        </p:txBody>
-      </p:sp>
-      <p:sp>
-        <p:nvSpPr>
-          <p:cNvPr id="17" name="Text 15"/>
-          <p:cNvSpPr/>
-          <p:nvPr/>
-        </p:nvSpPr>
-        <p:spPr>
-          <a:xfrm>
-            <a:off x="974378" y="2587377"/>
-            <a:ext cx="914623" cy="152400"/>
-          </a:xfrm>
-          <a:prstGeom prst="rect">
-            <a:avLst/>
-          </a:prstGeom>
-          <a:noFill/>
-          <a:ln/>
-        </p:spPr>
-        <p:txBody>
-          <a:bodyPr wrap="square" lIns="0" tIns="0" rIns="0" bIns="0" rtlCol="0" anchor="t"/>
-          <a:lstStyle/>
-          <a:p>
-            <a:pPr marL="0" indent="0" algn="l">
-              <a:buNone/>
-            </a:pPr>
-            <a:r>
-              <a:rPr lang="en-US" sz="1050" dirty="0">
-                <a:solidFill>
-                  <a:srgbClr val="CCCCCC"/>
-                </a:solidFill>
-                <a:latin typeface="Arial" pitchFamily="34" charset="0"/>
-                <a:ea typeface="Arial" pitchFamily="34" charset="-122"/>
-                <a:cs typeface="Arial" pitchFamily="34" charset="-120"/>
-              </a:rPr>
-              <a:t>Error Recovery</a:t>
-            </a:r>
-            <a:endParaRPr lang="en-US" sz="1050" dirty="0"/>
-          </a:p>
-        </p:txBody>
-      </p:sp>
-      <p:sp>
-        <p:nvSpPr>
-          <p:cNvPr id="18" name="Text 16"/>
-          <p:cNvSpPr/>
-          <p:nvPr/>
-        </p:nvSpPr>
-        <p:spPr>
-          <a:xfrm>
-            <a:off x="634901" y="2888903"/>
-            <a:ext cx="2539901" cy="323850"/>
-          </a:xfrm>
-          <a:prstGeom prst="roundRect">
-            <a:avLst>
-              <a:gd name="adj" fmla="val 23529"/>
-            </a:avLst>
-          </a:prstGeom>
-          <a:solidFill>
-            <a:srgbClr val="FFFFFF">
-              <a:alpha val="4000"/>
-            </a:srgbClr>
-          </a:solidFill>
-          <a:ln w="9525">
-            <a:solidFill>
-              <a:srgbClr val="B165FB"/>
-            </a:solidFill>
-          </a:ln>
-        </p:spPr>
-        <p:txBody>
-          <a:bodyPr wrap="square" rtlCol="0" anchor="ctr"/>
-          <a:lstStyle/>
-          <a:p>
-            <a:pPr marL="0" indent="0">
-              <a:buNone/>
-            </a:pPr>
-            <a:endParaRPr lang="en-US" dirty="0"/>
-          </a:p>
-        </p:txBody>
-      </p:sp>
-      <p:sp>
-        <p:nvSpPr>
-          <p:cNvPr id="19" name="Text 17"/>
-          <p:cNvSpPr/>
-          <p:nvPr/>
-        </p:nvSpPr>
-        <p:spPr>
-          <a:xfrm>
-            <a:off x="771376" y="3000077"/>
-            <a:ext cx="101501" cy="101501"/>
-          </a:xfrm>
-          <a:prstGeom prst="roundRect">
-            <a:avLst>
-              <a:gd name="adj" fmla="val 900878"/>
-            </a:avLst>
-          </a:prstGeom>
-          <a:solidFill>
-            <a:srgbClr val="40695B"/>
-          </a:solidFill>
-          <a:ln/>
-        </p:spPr>
-        <p:txBody>
-          <a:bodyPr wrap="square" rtlCol="0" anchor="ctr"/>
-          <a:lstStyle/>
-          <a:p>
-            <a:pPr marL="0" indent="0">
-              <a:buNone/>
-            </a:pPr>
-            <a:endParaRPr lang="en-US" dirty="0"/>
-          </a:p>
-        </p:txBody>
-      </p:sp>
-      <p:sp>
-        <p:nvSpPr>
-          <p:cNvPr id="20" name="Text 18"/>
-          <p:cNvSpPr/>
-          <p:nvPr/>
-        </p:nvSpPr>
-        <p:spPr>
-          <a:xfrm>
-            <a:off x="974378" y="2974628"/>
-            <a:ext cx="403193" cy="152400"/>
-          </a:xfrm>
-          <a:prstGeom prst="rect">
-            <a:avLst/>
-          </a:prstGeom>
-          <a:noFill/>
-          <a:ln/>
-        </p:spPr>
-        <p:txBody>
-          <a:bodyPr wrap="square" lIns="0" tIns="0" rIns="0" bIns="0" rtlCol="0" anchor="t"/>
-          <a:lstStyle/>
-          <a:p>
-            <a:pPr marL="0" indent="0" algn="l">
-              <a:buNone/>
-            </a:pPr>
-            <a:r>
-              <a:rPr lang="en-US" sz="1050" dirty="0">
-                <a:solidFill>
-                  <a:srgbClr val="CCCCCC"/>
-                </a:solidFill>
-                <a:latin typeface="Arial" pitchFamily="34" charset="0"/>
-                <a:ea typeface="Arial" pitchFamily="34" charset="-122"/>
-                <a:cs typeface="Arial" pitchFamily="34" charset="-120"/>
-              </a:rPr>
-              <a:t>Timing</a:t>
-            </a:r>
-            <a:endParaRPr lang="en-US" sz="1050" dirty="0"/>
-          </a:p>
-        </p:txBody>
-      </p:sp>
-      <p:sp>
-        <p:nvSpPr>
-          <p:cNvPr id="21" name="Text 19"/>
-          <p:cNvSpPr/>
-          <p:nvPr/>
-        </p:nvSpPr>
-        <p:spPr>
-          <a:xfrm>
-            <a:off x="634901" y="3276154"/>
-            <a:ext cx="2539901" cy="323850"/>
-          </a:xfrm>
-          <a:prstGeom prst="roundRect">
-            <a:avLst>
-              <a:gd name="adj" fmla="val 23529"/>
-            </a:avLst>
-          </a:prstGeom>
-          <a:solidFill>
-            <a:srgbClr val="FFFFFF">
-              <a:alpha val="4000"/>
-            </a:srgbClr>
-          </a:solidFill>
-          <a:ln w="9525">
-            <a:solidFill>
-              <a:srgbClr val="B165FB"/>
-            </a:solidFill>
-          </a:ln>
-        </p:spPr>
-        <p:txBody>
-          <a:bodyPr wrap="square" rtlCol="0" anchor="ctr"/>
-          <a:lstStyle/>
-          <a:p>
-            <a:pPr marL="0" indent="0">
-              <a:buNone/>
-            </a:pPr>
-            <a:endParaRPr lang="en-US" dirty="0"/>
-          </a:p>
-        </p:txBody>
-      </p:sp>
-      <p:sp>
-        <p:nvSpPr>
-          <p:cNvPr id="22" name="Text 20"/>
-          <p:cNvSpPr/>
-          <p:nvPr/>
-        </p:nvSpPr>
-        <p:spPr>
-          <a:xfrm>
-            <a:off x="771376" y="3387328"/>
-            <a:ext cx="101501" cy="101501"/>
-          </a:xfrm>
-          <a:prstGeom prst="roundRect">
-            <a:avLst>
-              <a:gd name="adj" fmla="val 900878"/>
-            </a:avLst>
-          </a:prstGeom>
-          <a:solidFill>
-            <a:srgbClr val="40695B"/>
-          </a:solidFill>
-          <a:ln/>
-        </p:spPr>
-        <p:txBody>
-          <a:bodyPr wrap="square" rtlCol="0" anchor="ctr"/>
-          <a:lstStyle/>
-          <a:p>
-            <a:pPr marL="0" indent="0">
-              <a:buNone/>
-            </a:pPr>
-            <a:endParaRPr lang="en-US" dirty="0"/>
-          </a:p>
-        </p:txBody>
-      </p:sp>
-      <p:sp>
-        <p:nvSpPr>
-          <p:cNvPr id="23" name="Text 21"/>
-          <p:cNvSpPr/>
-          <p:nvPr/>
-        </p:nvSpPr>
-        <p:spPr>
-          <a:xfrm>
-            <a:off x="974378" y="3361879"/>
-            <a:ext cx="574884" cy="152400"/>
-          </a:xfrm>
-          <a:prstGeom prst="rect">
-            <a:avLst/>
-          </a:prstGeom>
-          <a:noFill/>
-          <a:ln/>
-        </p:spPr>
-        <p:txBody>
-          <a:bodyPr wrap="square" lIns="0" tIns="0" rIns="0" bIns="0" rtlCol="0" anchor="t"/>
-          <a:lstStyle/>
-          <a:p>
-            <a:pPr marL="0" indent="0" algn="l">
-              <a:buNone/>
-            </a:pPr>
-            <a:r>
-              <a:rPr lang="en-US" sz="1050" dirty="0">
-                <a:solidFill>
-                  <a:srgbClr val="CCCCCC"/>
-                </a:solidFill>
-                <a:latin typeface="Arial" pitchFamily="34" charset="0"/>
-                <a:ea typeface="Arial" pitchFamily="34" charset="-122"/>
-                <a:cs typeface="Arial" pitchFamily="34" charset="-120"/>
-              </a:rPr>
-              <a:t>Audit Log</a:t>
-            </a:r>
-            <a:endParaRPr lang="en-US" sz="1050" dirty="0"/>
-          </a:p>
-        </p:txBody>
-      </p:sp>
-      <p:sp>
-        <p:nvSpPr>
-          <p:cNvPr id="24" name="Text 22"/>
-          <p:cNvSpPr/>
-          <p:nvPr/>
-        </p:nvSpPr>
-        <p:spPr>
-          <a:xfrm>
-            <a:off x="634901" y="3663404"/>
-            <a:ext cx="2539901" cy="323850"/>
-          </a:xfrm>
-          <a:prstGeom prst="roundRect">
-            <a:avLst>
-              <a:gd name="adj" fmla="val 23529"/>
-            </a:avLst>
-          </a:prstGeom>
-          <a:solidFill>
-            <a:srgbClr val="FFFFFF">
-              <a:alpha val="4000"/>
-            </a:srgbClr>
-          </a:solidFill>
-          <a:ln w="9525">
-            <a:solidFill>
-              <a:srgbClr val="B165FB"/>
-            </a:solidFill>
-          </a:ln>
-        </p:spPr>
-        <p:txBody>
-          <a:bodyPr wrap="square" rtlCol="0" anchor="ctr"/>
-          <a:lstStyle/>
-          <a:p>
-            <a:pPr marL="0" indent="0">
-              <a:buNone/>
-            </a:pPr>
-            <a:endParaRPr lang="en-US" dirty="0"/>
-          </a:p>
-        </p:txBody>
-      </p:sp>
-      <p:sp>
-        <p:nvSpPr>
-          <p:cNvPr id="25" name="Text 23"/>
-          <p:cNvSpPr/>
-          <p:nvPr/>
-        </p:nvSpPr>
-        <p:spPr>
-          <a:xfrm>
-            <a:off x="771376" y="3774579"/>
-            <a:ext cx="101501" cy="101501"/>
-          </a:xfrm>
-          <a:prstGeom prst="roundRect">
-            <a:avLst>
-              <a:gd name="adj" fmla="val 900878"/>
-            </a:avLst>
-          </a:prstGeom>
-          <a:solidFill>
-            <a:srgbClr val="40695B"/>
-          </a:solidFill>
-          <a:ln/>
-        </p:spPr>
-        <p:txBody>
-          <a:bodyPr wrap="square" rtlCol="0" anchor="ctr"/>
-          <a:lstStyle/>
-          <a:p>
-            <a:pPr marL="0" indent="0">
-              <a:buNone/>
-            </a:pPr>
-            <a:endParaRPr lang="en-US" dirty="0"/>
-          </a:p>
-        </p:txBody>
-      </p:sp>
-      <p:sp>
-        <p:nvSpPr>
-          <p:cNvPr id="26" name="Text 24"/>
-          <p:cNvSpPr/>
-          <p:nvPr/>
-        </p:nvSpPr>
-        <p:spPr>
-          <a:xfrm>
-            <a:off x="974378" y="3749129"/>
-            <a:ext cx="1053525" cy="152400"/>
-          </a:xfrm>
-          <a:prstGeom prst="rect">
-            <a:avLst/>
-          </a:prstGeom>
-          <a:noFill/>
-          <a:ln/>
-        </p:spPr>
-        <p:txBody>
-          <a:bodyPr wrap="square" lIns="0" tIns="0" rIns="0" bIns="0" rtlCol="0" anchor="t"/>
-          <a:lstStyle/>
-          <a:p>
-            <a:pPr marL="0" indent="0" algn="l">
-              <a:buNone/>
-            </a:pPr>
-            <a:r>
-              <a:rPr lang="en-US" sz="1050" dirty="0">
-                <a:solidFill>
-                  <a:srgbClr val="CCCCCC"/>
-                </a:solidFill>
-                <a:latin typeface="Arial" pitchFamily="34" charset="0"/>
-                <a:ea typeface="Arial" pitchFamily="34" charset="-122"/>
-                <a:cs typeface="Arial" pitchFamily="34" charset="-120"/>
-              </a:rPr>
-              <a:t>Turn File Logging</a:t>
-            </a:r>
-            <a:endParaRPr lang="en-US" sz="1050" dirty="0"/>
-          </a:p>
-        </p:txBody>
-      </p:sp>
-      <p:sp>
-        <p:nvSpPr>
-          <p:cNvPr id="27" name="Text 25"/>
-          <p:cNvSpPr/>
-          <p:nvPr/>
-        </p:nvSpPr>
-        <p:spPr>
-          <a:xfrm>
-            <a:off x="3479602" y="1339900"/>
-            <a:ext cx="5052060" cy="171450"/>
-          </a:xfrm>
-          <a:prstGeom prst="rect">
-            <a:avLst/>
-          </a:prstGeom>
-          <a:noFill/>
-          <a:ln/>
-        </p:spPr>
-        <p:txBody>
-          <a:bodyPr wrap="square" lIns="0" tIns="0" rIns="0" bIns="0" rtlCol="0" anchor="t"/>
-          <a:lstStyle/>
-          <a:p>
-            <a:pPr marL="0" indent="0" algn="l">
-              <a:spcAft>
-                <a:spcPts val="600"/>
-              </a:spcAft>
-              <a:buNone/>
-            </a:pPr>
-            <a:r>
-              <a:rPr lang="en-US" sz="1200" b="1" dirty="0">
-                <a:solidFill>
-                  <a:srgbClr val="40695B"/>
-                </a:solidFill>
-                <a:latin typeface="Arial" pitchFamily="34" charset="0"/>
-                <a:ea typeface="Arial" pitchFamily="34" charset="-122"/>
-                <a:cs typeface="Arial" pitchFamily="34" charset="-120"/>
-              </a:rPr>
-              <a:t>Three Lifecycle Hooks</a:t>
-            </a:r>
-            <a:endParaRPr lang="en-US" sz="1200" dirty="0"/>
-          </a:p>
-        </p:txBody>
-      </p:sp>
-      <p:sp>
-        <p:nvSpPr>
-          <p:cNvPr id="28" name="Text 26"/>
-          <p:cNvSpPr/>
-          <p:nvPr/>
-        </p:nvSpPr>
-        <p:spPr>
-          <a:xfrm>
-            <a:off x="3479602" y="1587550"/>
-            <a:ext cx="4953000" cy="1796355"/>
-          </a:xfrm>
-          <a:prstGeom prst="roundRect">
-            <a:avLst>
-              <a:gd name="adj" fmla="val 5656"/>
-            </a:avLst>
-          </a:prstGeom>
-          <a:solidFill>
-            <a:srgbClr val="0D0F14"/>
-          </a:solidFill>
-          <a:ln w="9525">
-            <a:solidFill>
-              <a:srgbClr val="B165FB"/>
-            </a:solidFill>
-          </a:ln>
-        </p:spPr>
-        <p:txBody>
-          <a:bodyPr wrap="square" rtlCol="0" anchor="ctr"/>
-          <a:lstStyle/>
-          <a:p>
-            <a:pPr marL="0" indent="0">
-              <a:buNone/>
-            </a:pPr>
-            <a:endParaRPr lang="en-US" dirty="0"/>
-          </a:p>
-        </p:txBody>
-      </p:sp>
-      <p:sp>
-        <p:nvSpPr>
-          <p:cNvPr id="29" name="Text 27"/>
-          <p:cNvSpPr/>
-          <p:nvPr/>
-        </p:nvSpPr>
-        <p:spPr>
-          <a:xfrm>
-            <a:off x="3641527" y="1724025"/>
-            <a:ext cx="4721733" cy="114300"/>
-          </a:xfrm>
-          <a:prstGeom prst="rect">
-            <a:avLst/>
-          </a:prstGeom>
-          <a:noFill/>
-          <a:ln/>
-        </p:spPr>
-        <p:txBody>
-          <a:bodyPr wrap="square" lIns="0" tIns="0" rIns="0" bIns="0" rtlCol="0" anchor="t"/>
-          <a:lstStyle/>
-          <a:p>
-            <a:pPr marL="0" indent="0" algn="l">
-              <a:spcAft>
-                <a:spcPts val="100"/>
-              </a:spcAft>
-              <a:buNone/>
-            </a:pPr>
-            <a:r>
-              <a:rPr lang="en-US" sz="850" dirty="0">
-                <a:solidFill>
-                  <a:srgbClr val="B165FB"/>
-                </a:solidFill>
-                <a:latin typeface="Courier New" pitchFamily="34" charset="0"/>
-                <a:ea typeface="Courier New" pitchFamily="34" charset="-122"/>
-                <a:cs typeface="Courier New" pitchFamily="34" charset="-120"/>
-              </a:rPr>
-              <a:t>execute_turn(ctx, core_fn)</a:t>
-            </a:r>
-            <a:endParaRPr lang="en-US" sz="850" dirty="0"/>
-          </a:p>
-        </p:txBody>
-      </p:sp>
-      <p:sp>
-        <p:nvSpPr>
-          <p:cNvPr id="30" name="Text 28"/>
-          <p:cNvSpPr/>
-          <p:nvPr/>
-        </p:nvSpPr>
-        <p:spPr>
-          <a:xfrm>
-            <a:off x="3641527" y="1850975"/>
-            <a:ext cx="4721733" cy="114300"/>
-          </a:xfrm>
-          <a:prstGeom prst="rect">
-            <a:avLst/>
-          </a:prstGeom>
-          <a:noFill/>
-          <a:ln/>
-        </p:spPr>
-        <p:txBody>
-          <a:bodyPr wrap="square" lIns="0" tIns="0" rIns="0" bIns="0" rtlCol="0" anchor="t"/>
-          <a:lstStyle/>
-          <a:p>
-            <a:pPr marL="0" indent="0" algn="l">
-              <a:spcAft>
-                <a:spcPts val="100"/>
-              </a:spcAft>
-              <a:buNone/>
-            </a:pPr>
-            <a:r>
-              <a:rPr lang="en-US" sz="850" dirty="0">
-                <a:solidFill>
-                  <a:srgbClr val="B165FB"/>
-                </a:solidFill>
-                <a:latin typeface="Courier New" pitchFamily="34" charset="0"/>
-                <a:ea typeface="Courier New" pitchFamily="34" charset="-122"/>
-                <a:cs typeface="Courier New" pitchFamily="34" charset="-120"/>
-              </a:rPr>
-              <a:t>for mw: before_turn(ctx)</a:t>
-            </a:r>
-            <a:endParaRPr lang="en-US" sz="850" dirty="0"/>
-          </a:p>
-        </p:txBody>
-      </p:sp>
-      <p:sp>
-        <p:nvSpPr>
-          <p:cNvPr id="31" name="Text 29"/>
-          <p:cNvSpPr/>
-          <p:nvPr/>
-        </p:nvSpPr>
-        <p:spPr>
-          <a:xfrm>
-            <a:off x="3641527" y="1977926"/>
-            <a:ext cx="4721733" cy="114300"/>
-          </a:xfrm>
-          <a:prstGeom prst="rect">
-            <a:avLst/>
-          </a:prstGeom>
-          <a:noFill/>
-          <a:ln/>
-        </p:spPr>
-        <p:txBody>
-          <a:bodyPr wrap="square" lIns="0" tIns="0" rIns="0" bIns="0" rtlCol="0" anchor="t"/>
-          <a:lstStyle/>
-          <a:p>
-            <a:pPr marL="0" indent="0" algn="l">
-              <a:spcAft>
-                <a:spcPts val="100"/>
-              </a:spcAft>
-              <a:buNone/>
-            </a:pPr>
-            <a:r>
-              <a:rPr lang="en-US" sz="850" dirty="0">
-                <a:solidFill>
-                  <a:srgbClr val="B165FB"/>
-                </a:solidFill>
-                <a:latin typeface="Courier New" pitchFamily="34" charset="0"/>
-                <a:ea typeface="Courier New" pitchFamily="34" charset="-122"/>
-                <a:cs typeface="Courier New" pitchFamily="34" charset="-120"/>
-              </a:rPr>
-              <a:t>core_fn(ctx)  # LLM + actions</a:t>
-            </a:r>
-            <a:endParaRPr lang="en-US" sz="850" dirty="0"/>
-          </a:p>
-        </p:txBody>
-      </p:sp>
-      <p:sp>
-        <p:nvSpPr>
-          <p:cNvPr id="32" name="Text 30"/>
-          <p:cNvSpPr/>
-          <p:nvPr/>
-        </p:nvSpPr>
-        <p:spPr>
-          <a:xfrm>
-            <a:off x="3641527" y="2104876"/>
-            <a:ext cx="4721733" cy="114300"/>
-          </a:xfrm>
-          <a:prstGeom prst="rect">
-            <a:avLst/>
-          </a:prstGeom>
-          <a:noFill/>
-          <a:ln/>
-        </p:spPr>
-        <p:txBody>
-          <a:bodyPr wrap="square" lIns="0" tIns="0" rIns="0" bIns="0" rtlCol="0" anchor="t"/>
-          <a:lstStyle/>
-          <a:p>
-            <a:pPr marL="0" indent="0" algn="l">
-              <a:spcAft>
-                <a:spcPts val="100"/>
-              </a:spcAft>
-              <a:buNone/>
-            </a:pPr>
-            <a:r>
-              <a:rPr lang="en-US" sz="850" dirty="0">
-                <a:solidFill>
-                  <a:srgbClr val="B165FB"/>
-                </a:solidFill>
-                <a:latin typeface="Courier New" pitchFamily="34" charset="0"/>
-                <a:ea typeface="Courier New" pitchFamily="34" charset="-122"/>
-                <a:cs typeface="Courier New" pitchFamily="34" charset="-120"/>
-              </a:rPr>
-              <a:t>for mw (reversed): after_turn(ctx)</a:t>
-            </a:r>
-            <a:endParaRPr lang="en-US" sz="850" dirty="0"/>
-          </a:p>
-        </p:txBody>
-      </p:sp>
-      <p:sp>
-        <p:nvSpPr>
-          <p:cNvPr id="33" name="Text 31"/>
-          <p:cNvSpPr/>
-          <p:nvPr/>
-        </p:nvSpPr>
-        <p:spPr>
-          <a:xfrm>
-            <a:off x="3641527" y="2231827"/>
-            <a:ext cx="4721733" cy="114300"/>
-          </a:xfrm>
-          <a:prstGeom prst="rect">
-            <a:avLst/>
-          </a:prstGeom>
-          <a:noFill/>
-          <a:ln/>
-        </p:spPr>
-        <p:txBody>
-          <a:bodyPr wrap="square" lIns="0" tIns="0" rIns="0" bIns="0" rtlCol="0" anchor="t"/>
-          <a:lstStyle/>
-          <a:p>
-            <a:pPr marL="0" indent="0" algn="l">
-              <a:spcAft>
-                <a:spcPts val="100"/>
-              </a:spcAft>
-              <a:buNone/>
-            </a:pPr>
-            <a:r>
-              <a:rPr lang="en-US" sz="850" dirty="0">
-                <a:solidFill>
-                  <a:srgbClr val="B165FB"/>
-                </a:solidFill>
-                <a:latin typeface="Courier New" pitchFamily="34" charset="0"/>
-                <a:ea typeface="Courier New" pitchFamily="34" charset="-122"/>
-                <a:cs typeface="Courier New" pitchFamily="34" charset="-120"/>
-              </a:rPr>
-              <a:t>execute_model_call(messages, model_fn)</a:t>
-            </a:r>
-            <a:endParaRPr lang="en-US" sz="850" dirty="0"/>
-          </a:p>
-        </p:txBody>
-      </p:sp>
-      <p:sp>
-        <p:nvSpPr>
-          <p:cNvPr id="34" name="Text 32"/>
-          <p:cNvSpPr/>
-          <p:nvPr/>
-        </p:nvSpPr>
-        <p:spPr>
-          <a:xfrm>
-            <a:off x="3641527" y="2358777"/>
-            <a:ext cx="4721733" cy="114300"/>
-          </a:xfrm>
-          <a:prstGeom prst="rect">
-            <a:avLst/>
-          </a:prstGeom>
-          <a:noFill/>
-          <a:ln/>
-        </p:spPr>
-        <p:txBody>
-          <a:bodyPr wrap="square" lIns="0" tIns="0" rIns="0" bIns="0" rtlCol="0" anchor="t"/>
-          <a:lstStyle/>
-          <a:p>
-            <a:pPr marL="0" indent="0" algn="l">
-              <a:spcAft>
-                <a:spcPts val="100"/>
-              </a:spcAft>
-              <a:buNone/>
-            </a:pPr>
-            <a:r>
-              <a:rPr lang="en-US" sz="850" dirty="0">
-                <a:solidFill>
-                  <a:srgbClr val="B165FB"/>
-                </a:solidFill>
-                <a:latin typeface="Courier New" pitchFamily="34" charset="0"/>
-                <a:ea typeface="Courier New" pitchFamily="34" charset="-122"/>
-                <a:cs typeface="Courier New" pitchFamily="34" charset="-120"/>
-              </a:rPr>
-              <a:t>for mw: before_model_call(ctx)</a:t>
-            </a:r>
-            <a:endParaRPr lang="en-US" sz="850" dirty="0"/>
-          </a:p>
-        </p:txBody>
-      </p:sp>
-      <p:sp>
-        <p:nvSpPr>
-          <p:cNvPr id="35" name="Text 33"/>
-          <p:cNvSpPr/>
-          <p:nvPr/>
-        </p:nvSpPr>
-        <p:spPr>
-          <a:xfrm>
-            <a:off x="3641527" y="2485727"/>
-            <a:ext cx="4721733" cy="114300"/>
-          </a:xfrm>
-          <a:prstGeom prst="rect">
-            <a:avLst/>
-          </a:prstGeom>
-          <a:noFill/>
-          <a:ln/>
-        </p:spPr>
-        <p:txBody>
-          <a:bodyPr wrap="square" lIns="0" tIns="0" rIns="0" bIns="0" rtlCol="0" anchor="t"/>
-          <a:lstStyle/>
-          <a:p>
-            <a:pPr marL="0" indent="0" algn="l">
-              <a:spcAft>
-                <a:spcPts val="100"/>
-              </a:spcAft>
-              <a:buNone/>
-            </a:pPr>
-            <a:r>
-              <a:rPr lang="en-US" sz="850" dirty="0">
-                <a:solidFill>
-                  <a:srgbClr val="B165FB"/>
-                </a:solidFill>
-                <a:latin typeface="Courier New" pitchFamily="34" charset="0"/>
-                <a:ea typeface="Courier New" pitchFamily="34" charset="-122"/>
-                <a:cs typeface="Courier New" pitchFamily="34" charset="-120"/>
-              </a:rPr>
-              <a:t>model_fn(messages)  # LLM API</a:t>
-            </a:r>
-            <a:endParaRPr lang="en-US" sz="850" dirty="0"/>
-          </a:p>
-        </p:txBody>
-      </p:sp>
-      <p:sp>
-        <p:nvSpPr>
-          <p:cNvPr id="36" name="Text 34"/>
-          <p:cNvSpPr/>
-          <p:nvPr/>
-        </p:nvSpPr>
-        <p:spPr>
-          <a:xfrm>
-            <a:off x="3641527" y="2612678"/>
-            <a:ext cx="4721733" cy="114300"/>
-          </a:xfrm>
-          <a:prstGeom prst="rect">
-            <a:avLst/>
-          </a:prstGeom>
-          <a:noFill/>
-          <a:ln/>
-        </p:spPr>
-        <p:txBody>
-          <a:bodyPr wrap="square" lIns="0" tIns="0" rIns="0" bIns="0" rtlCol="0" anchor="t"/>
-          <a:lstStyle/>
-          <a:p>
-            <a:pPr marL="0" indent="0" algn="l">
-              <a:spcAft>
-                <a:spcPts val="100"/>
-              </a:spcAft>
-              <a:buNone/>
-            </a:pPr>
-            <a:r>
-              <a:rPr lang="en-US" sz="850" dirty="0">
-                <a:solidFill>
-                  <a:srgbClr val="B165FB"/>
-                </a:solidFill>
-                <a:latin typeface="Courier New" pitchFamily="34" charset="0"/>
-                <a:ea typeface="Courier New" pitchFamily="34" charset="-122"/>
-                <a:cs typeface="Courier New" pitchFamily="34" charset="-120"/>
-              </a:rPr>
-              <a:t>for mw (reversed): after_model_call(ctx)</a:t>
-            </a:r>
-            <a:endParaRPr lang="en-US" sz="850" dirty="0"/>
-          </a:p>
-        </p:txBody>
-      </p:sp>
-      <p:sp>
-        <p:nvSpPr>
-          <p:cNvPr id="37" name="Text 35"/>
-          <p:cNvSpPr/>
-          <p:nvPr/>
-        </p:nvSpPr>
-        <p:spPr>
-          <a:xfrm>
-            <a:off x="3641527" y="2739628"/>
-            <a:ext cx="4721733" cy="114300"/>
-          </a:xfrm>
-          <a:prstGeom prst="rect">
-            <a:avLst/>
-          </a:prstGeom>
-          <a:noFill/>
-          <a:ln/>
-        </p:spPr>
-        <p:txBody>
-          <a:bodyPr wrap="square" lIns="0" tIns="0" rIns="0" bIns="0" rtlCol="0" anchor="t"/>
-          <a:lstStyle/>
-          <a:p>
-            <a:pPr marL="0" indent="0" algn="l">
-              <a:spcAft>
-                <a:spcPts val="100"/>
-              </a:spcAft>
-              <a:buNone/>
-            </a:pPr>
-            <a:r>
-              <a:rPr lang="en-US" sz="850" dirty="0">
-                <a:solidFill>
-                  <a:srgbClr val="B165FB"/>
-                </a:solidFill>
-                <a:latin typeface="Courier New" pitchFamily="34" charset="0"/>
-                <a:ea typeface="Courier New" pitchFamily="34" charset="-122"/>
-                <a:cs typeface="Courier New" pitchFamily="34" charset="-120"/>
-              </a:rPr>
-              <a:t>execute_action(action, handler)</a:t>
-            </a:r>
-            <a:endParaRPr lang="en-US" sz="850" dirty="0"/>
-          </a:p>
-        </p:txBody>
-      </p:sp>
-      <p:sp>
-        <p:nvSpPr>
-          <p:cNvPr id="38" name="Text 36"/>
-          <p:cNvSpPr/>
-          <p:nvPr/>
-        </p:nvSpPr>
-        <p:spPr>
-          <a:xfrm>
-            <a:off x="3641527" y="2866579"/>
-            <a:ext cx="4721733" cy="114300"/>
-          </a:xfrm>
-          <a:prstGeom prst="rect">
-            <a:avLst/>
-          </a:prstGeom>
-          <a:noFill/>
-          <a:ln/>
-        </p:spPr>
-        <p:txBody>
-          <a:bodyPr wrap="square" lIns="0" tIns="0" rIns="0" bIns="0" rtlCol="0" anchor="t"/>
-          <a:lstStyle/>
-          <a:p>
-            <a:pPr marL="0" indent="0" algn="l">
-              <a:spcAft>
-                <a:spcPts val="100"/>
-              </a:spcAft>
-              <a:buNone/>
-            </a:pPr>
-            <a:r>
-              <a:rPr lang="en-US" sz="850" dirty="0">
-                <a:solidFill>
-                  <a:srgbClr val="B165FB"/>
-                </a:solidFill>
-                <a:latin typeface="Courier New" pitchFamily="34" charset="0"/>
-                <a:ea typeface="Courier New" pitchFamily="34" charset="-122"/>
-                <a:cs typeface="Courier New" pitchFamily="34" charset="-120"/>
-              </a:rPr>
-              <a:t>for mw: before_action_call(ctx)</a:t>
-            </a:r>
-            <a:endParaRPr lang="en-US" sz="850" dirty="0"/>
-          </a:p>
-        </p:txBody>
-      </p:sp>
-      <p:sp>
-        <p:nvSpPr>
-          <p:cNvPr id="39" name="Text 37"/>
-          <p:cNvSpPr/>
-          <p:nvPr/>
-        </p:nvSpPr>
-        <p:spPr>
-          <a:xfrm>
-            <a:off x="3641527" y="2993529"/>
-            <a:ext cx="4721733" cy="114300"/>
-          </a:xfrm>
-          <a:prstGeom prst="rect">
-            <a:avLst/>
-          </a:prstGeom>
-          <a:noFill/>
-          <a:ln/>
-        </p:spPr>
-        <p:txBody>
-          <a:bodyPr wrap="square" lIns="0" tIns="0" rIns="0" bIns="0" rtlCol="0" anchor="t"/>
-          <a:lstStyle/>
-          <a:p>
-            <a:pPr marL="0" indent="0" algn="l">
-              <a:spcAft>
-                <a:spcPts val="100"/>
-              </a:spcAft>
-              <a:buNone/>
-            </a:pPr>
-            <a:r>
-              <a:rPr lang="en-US" sz="850" dirty="0">
-                <a:solidFill>
-                  <a:srgbClr val="B165FB"/>
-                </a:solidFill>
-                <a:latin typeface="Courier New" pitchFamily="34" charset="0"/>
-                <a:ea typeface="Courier New" pitchFamily="34" charset="-122"/>
-                <a:cs typeface="Courier New" pitchFamily="34" charset="-120"/>
-              </a:rPr>
-              <a:t>handler(action)  # Tool exec</a:t>
-            </a:r>
-            <a:endParaRPr lang="en-US" sz="850" dirty="0"/>
-          </a:p>
-        </p:txBody>
-      </p:sp>
-      <p:sp>
-        <p:nvSpPr>
-          <p:cNvPr id="40" name="Text 38"/>
-          <p:cNvSpPr/>
-          <p:nvPr/>
-        </p:nvSpPr>
-        <p:spPr>
-          <a:xfrm>
-            <a:off x="3641527" y="3120479"/>
-            <a:ext cx="4721733" cy="114300"/>
-          </a:xfrm>
-          <a:prstGeom prst="rect">
-            <a:avLst/>
-          </a:prstGeom>
-          <a:noFill/>
-          <a:ln/>
-        </p:spPr>
-        <p:txBody>
-          <a:bodyPr wrap="square" lIns="0" tIns="0" rIns="0" bIns="0" rtlCol="0" anchor="t"/>
-          <a:lstStyle/>
-          <a:p>
-            <a:pPr marL="0" indent="0" algn="l">
-              <a:spcAft>
-                <a:spcPts val="100"/>
-              </a:spcAft>
-              <a:buNone/>
-            </a:pPr>
-            <a:r>
-              <a:rPr lang="en-US" sz="850" dirty="0">
-                <a:solidFill>
-                  <a:srgbClr val="B165FB"/>
-                </a:solidFill>
-                <a:latin typeface="Courier New" pitchFamily="34" charset="0"/>
-                <a:ea typeface="Courier New" pitchFamily="34" charset="-122"/>
-                <a:cs typeface="Courier New" pitchFamily="34" charset="-120"/>
-              </a:rPr>
-              <a:t>for mw (reversed): after_action_call(ctx)</a:t>
-            </a:r>
-            <a:endParaRPr lang="en-US" sz="850" dirty="0"/>
-          </a:p>
-        </p:txBody>
-      </p:sp>
-      <p:sp>
-        <p:nvSpPr>
-          <p:cNvPr id="41" name="Text 39"/>
-          <p:cNvSpPr/>
-          <p:nvPr/>
-        </p:nvSpPr>
-        <p:spPr>
-          <a:xfrm>
-            <a:off x="3479602" y="3485406"/>
-            <a:ext cx="4953000" cy="500063"/>
-          </a:xfrm>
-          <a:prstGeom prst="rect">
-            <a:avLst/>
-          </a:prstGeom>
-          <a:solidFill>
-            <a:srgbClr val="40695B">
-              <a:alpha val="10000"/>
-            </a:srgbClr>
-          </a:solidFill>
-          <a:ln/>
-        </p:spPr>
-        <p:txBody>
-          <a:bodyPr wrap="square" rtlCol="0" anchor="ctr"/>
-          <a:lstStyle/>
-          <a:p>
-            <a:pPr marL="0" indent="0">
-              <a:buNone/>
-            </a:pPr>
-            <a:endParaRPr lang="en-US" dirty="0"/>
-          </a:p>
-        </p:txBody>
-      </p:sp>
-      <p:sp>
-        <p:nvSpPr>
-          <p:cNvPr id="42" name="Shape 40"/>
-          <p:cNvSpPr/>
-          <p:nvPr/>
-        </p:nvSpPr>
-        <p:spPr>
-          <a:xfrm>
-            <a:off x="3498652" y="3485406"/>
-            <a:ext cx="0" cy="500062"/>
-          </a:xfrm>
-          <a:prstGeom prst="line">
-            <a:avLst/>
-          </a:prstGeom>
-          <a:noFill/>
-          <a:ln w="38100">
-            <a:solidFill>
-              <a:srgbClr val="40695B"/>
-            </a:solidFill>
-            <a:prstDash val="solid"/>
-          </a:ln>
-        </p:spPr>
-        <p:txBody>
-          <a:bodyPr/>
-          <a:lstStyle/>
-          <a:p>
-            <a:endParaRPr lang="en-US"/>
-          </a:p>
-        </p:txBody>
-      </p:sp>
-      <p:sp>
-        <p:nvSpPr>
-          <p:cNvPr id="43" name="Text 41"/>
-          <p:cNvSpPr/>
-          <p:nvPr/>
-        </p:nvSpPr>
-        <p:spPr>
-          <a:xfrm>
-            <a:off x="3670102" y="3586907"/>
-            <a:ext cx="4702302" cy="297061"/>
-          </a:xfrm>
-          <a:prstGeom prst="rect">
-            <a:avLst/>
-          </a:prstGeom>
-          <a:noFill/>
-          <a:ln/>
-        </p:spPr>
-        <p:txBody>
-          <a:bodyPr wrap="square" lIns="0" tIns="0" rIns="0" bIns="0" rtlCol="0" anchor="t"/>
-          <a:lstStyle/>
-          <a:p>
-            <a:pPr marL="0" indent="0" algn="l">
-              <a:lnSpc>
-                <a:spcPts val="1170"/>
-              </a:lnSpc>
-              <a:buNone/>
-            </a:pPr>
-            <a:r>
-              <a:rPr lang="en-US" sz="900" b="1" dirty="0">
-                <a:solidFill>
-                  <a:srgbClr val="AAAAAA"/>
-                </a:solidFill>
-                <a:latin typeface="Arial" pitchFamily="34" charset="0"/>
-                <a:ea typeface="Arial" pitchFamily="34" charset="-122"/>
-                <a:cs typeface="Arial" pitchFamily="34" charset="-120"/>
-              </a:rPr>
-              <a:t>Short-circuit support:</a:t>
-            </a:r>
-            <a:r>
-              <a:rPr lang="en-US" sz="900" dirty="0">
-                <a:solidFill>
-                  <a:srgbClr val="AAAAAA"/>
-                </a:solidFill>
-                <a:latin typeface="Arial" pitchFamily="34" charset="0"/>
-                <a:ea typeface="Arial" pitchFamily="34" charset="-122"/>
-                <a:cs typeface="Arial" pitchFamily="34" charset="-120"/>
-              </a:rPr>
-              <a:t> Any middleware can abort a turn or skip an action/model call, and only middlewares that ran before will unwind.</a:t>
-            </a:r>
-            <a:endParaRPr lang="en-US" sz="900" dirty="0"/>
-          </a:p>
-        </p:txBody>
-      </p:sp>
-    </p:spTree>
-  </p:cSld>
-  <p:clrMapOvr>
-    <a:masterClrMapping/>
-  </p:clrMapOvr>
-</p:sld>
-</file>
-
-<file path=ppt/slides/slide8.xml><?xml version="1.0" encoding="utf-8"?>
-<p:sld xmlns:a="http://schemas.openxmlformats.org/drawingml/2006/main" xmlns:r="http://schemas.openxmlformats.org/officeDocument/2006/relationships" xmlns:p="http://schemas.openxmlformats.org/presentationml/2006/main">
   <p:cSld name="Slide 8">
     <p:bg>
       <p:bgPr>
@@ -13775,7 +10582,7 @@
 </p:sld>
 </file>
 
-<file path=ppt/slides/slide9.xml><?xml version="1.0" encoding="utf-8"?>
+<file path=ppt/slides/slide8.xml><?xml version="1.0" encoding="utf-8"?>
 <p:sld xmlns:a="http://schemas.openxmlformats.org/drawingml/2006/main" xmlns:r="http://schemas.openxmlformats.org/officeDocument/2006/relationships" xmlns:p="http://schemas.openxmlformats.org/presentationml/2006/main">
   <p:cSld name="Slide 9">
     <p:bg>
@@ -15248,6 +12055,1281 @@
                 <a:cs typeface="Arial" pitchFamily="34" charset="-120"/>
               </a:rPr>
               <a:t>FinishAction(message="Authentication added successfully") - task complete with full audit trail</a:t>
+            </a:r>
+            <a:endParaRPr lang="en-US" sz="850" dirty="0"/>
+          </a:p>
+        </p:txBody>
+      </p:sp>
+    </p:spTree>
+  </p:cSld>
+  <p:clrMapOvr>
+    <a:masterClrMapping/>
+  </p:clrMapOvr>
+</p:sld>
+</file>
+
+<file path=ppt/slides/slide9.xml><?xml version="1.0" encoding="utf-8"?>
+<p:sld xmlns:a="http://schemas.openxmlformats.org/drawingml/2006/main" xmlns:r="http://schemas.openxmlformats.org/officeDocument/2006/relationships" xmlns:p="http://schemas.openxmlformats.org/presentationml/2006/main">
+  <p:cSld name="Slide 10">
+    <p:bg>
+      <p:bgPr>
+        <a:solidFill>
+          <a:srgbClr val="181B24"/>
+        </a:solidFill>
+        <a:effectLst/>
+      </p:bgPr>
+    </p:bg>
+    <p:spTree>
+      <p:nvGrpSpPr>
+        <p:cNvPr id="1" name=""/>
+        <p:cNvGrpSpPr/>
+        <p:nvPr/>
+      </p:nvGrpSpPr>
+      <p:grpSpPr>
+        <a:xfrm>
+          <a:off x="0" y="0"/>
+          <a:ext cx="0" cy="0"/>
+          <a:chOff x="0" y="0"/>
+          <a:chExt cx="0" cy="0"/>
+        </a:xfrm>
+      </p:grpSpPr>
+      <p:sp>
+        <p:nvSpPr>
+          <p:cNvPr id="2" name="Text 0"/>
+          <p:cNvSpPr/>
+          <p:nvPr/>
+        </p:nvSpPr>
+        <p:spPr>
+          <a:xfrm>
+            <a:off x="0" y="0"/>
+            <a:ext cx="9144000" cy="50750"/>
+          </a:xfrm>
+          <a:prstGeom prst="rect">
+            <a:avLst/>
+          </a:prstGeom>
+          <a:solidFill>
+            <a:srgbClr val="B165FB"/>
+          </a:solidFill>
+          <a:ln/>
+        </p:spPr>
+        <p:txBody>
+          <a:bodyPr wrap="square" rtlCol="0" anchor="ctr"/>
+          <a:lstStyle/>
+          <a:p>
+            <a:pPr marL="0" indent="0">
+              <a:buNone/>
+            </a:pPr>
+            <a:endParaRPr lang="en-US" dirty="0"/>
+          </a:p>
+        </p:txBody>
+      </p:sp>
+      <p:sp>
+        <p:nvSpPr>
+          <p:cNvPr id="3" name="Text 1"/>
+          <p:cNvSpPr/>
+          <p:nvPr/>
+        </p:nvSpPr>
+        <p:spPr>
+          <a:xfrm>
+            <a:off x="507950" y="330101"/>
+            <a:ext cx="8290509" cy="352425"/>
+          </a:xfrm>
+          <a:prstGeom prst="rect">
+            <a:avLst/>
+          </a:prstGeom>
+          <a:noFill/>
+          <a:ln/>
+        </p:spPr>
+        <p:txBody>
+          <a:bodyPr wrap="square" lIns="0" tIns="0" rIns="0" bIns="0" rtlCol="0" anchor="t"/>
+          <a:lstStyle/>
+          <a:p>
+            <a:pPr marL="0" indent="0" algn="l">
+              <a:spcAft>
+                <a:spcPts val="400"/>
+              </a:spcAft>
+              <a:buNone/>
+            </a:pPr>
+            <a:r>
+              <a:rPr lang="en-US" sz="2400" b="1" dirty="0">
+                <a:solidFill>
+                  <a:srgbClr val="B165FB"/>
+                </a:solidFill>
+                <a:latin typeface="Arial" pitchFamily="34" charset="0"/>
+                <a:ea typeface="Arial" pitchFamily="34" charset="-122"/>
+                <a:cs typeface="Arial" pitchFamily="34" charset="-120"/>
+              </a:rPr>
+              <a:t>Key Design Decisions</a:t>
+            </a:r>
+            <a:endParaRPr lang="en-US" sz="2400" dirty="0"/>
+          </a:p>
+        </p:txBody>
+      </p:sp>
+      <p:sp>
+        <p:nvSpPr>
+          <p:cNvPr id="4" name="Text 2"/>
+          <p:cNvSpPr/>
+          <p:nvPr/>
+        </p:nvSpPr>
+        <p:spPr>
+          <a:xfrm>
+            <a:off x="507950" y="733276"/>
+            <a:ext cx="762000" cy="38100"/>
+          </a:xfrm>
+          <a:prstGeom prst="rect">
+            <a:avLst/>
+          </a:prstGeom>
+          <a:solidFill>
+            <a:srgbClr val="40695B"/>
+          </a:solidFill>
+          <a:ln/>
+        </p:spPr>
+        <p:txBody>
+          <a:bodyPr wrap="square" rtlCol="0" anchor="ctr"/>
+          <a:lstStyle/>
+          <a:p>
+            <a:pPr marL="0" indent="0">
+              <a:buNone/>
+            </a:pPr>
+            <a:endParaRPr lang="en-US" dirty="0"/>
+          </a:p>
+        </p:txBody>
+      </p:sp>
+      <p:sp>
+        <p:nvSpPr>
+          <p:cNvPr id="5" name="Text 3"/>
+          <p:cNvSpPr/>
+          <p:nvPr/>
+        </p:nvSpPr>
+        <p:spPr>
+          <a:xfrm>
+            <a:off x="507950" y="898327"/>
+            <a:ext cx="2624733" cy="972889"/>
+          </a:xfrm>
+          <a:prstGeom prst="roundRect">
+            <a:avLst>
+              <a:gd name="adj" fmla="val 7832"/>
+            </a:avLst>
+          </a:prstGeom>
+          <a:solidFill>
+            <a:srgbClr val="FFFFFF">
+              <a:alpha val="3000"/>
+            </a:srgbClr>
+          </a:solidFill>
+          <a:ln w="9525">
+            <a:solidFill>
+              <a:srgbClr val="FFFFFF"/>
+            </a:solidFill>
+          </a:ln>
+        </p:spPr>
+        <p:txBody>
+          <a:bodyPr wrap="square" rtlCol="0" anchor="ctr"/>
+          <a:lstStyle/>
+          <a:p>
+            <a:pPr marL="0" indent="0">
+              <a:buNone/>
+            </a:pPr>
+            <a:endParaRPr lang="en-US" dirty="0"/>
+          </a:p>
+        </p:txBody>
+      </p:sp>
+      <p:sp>
+        <p:nvSpPr>
+          <p:cNvPr id="6" name="Text 4"/>
+          <p:cNvSpPr/>
+          <p:nvPr/>
+        </p:nvSpPr>
+        <p:spPr>
+          <a:xfrm>
+            <a:off x="669875" y="1034802"/>
+            <a:ext cx="228600" cy="228600"/>
+          </a:xfrm>
+          <a:prstGeom prst="roundRect">
+            <a:avLst>
+              <a:gd name="adj" fmla="val 22222"/>
+            </a:avLst>
+          </a:prstGeom>
+          <a:solidFill>
+            <a:srgbClr val="B165FB"/>
+          </a:solidFill>
+          <a:ln/>
+        </p:spPr>
+        <p:txBody>
+          <a:bodyPr wrap="square" rtlCol="0" anchor="ctr"/>
+          <a:lstStyle/>
+          <a:p>
+            <a:pPr marL="0" indent="0">
+              <a:buNone/>
+            </a:pPr>
+            <a:endParaRPr lang="en-US" dirty="0"/>
+          </a:p>
+        </p:txBody>
+      </p:sp>
+      <p:sp>
+        <p:nvSpPr>
+          <p:cNvPr id="7" name="Text 5"/>
+          <p:cNvSpPr/>
+          <p:nvPr/>
+        </p:nvSpPr>
+        <p:spPr>
+          <a:xfrm>
+            <a:off x="752326" y="1082427"/>
+            <a:ext cx="64972" cy="133350"/>
+          </a:xfrm>
+          <a:prstGeom prst="rect">
+            <a:avLst/>
+          </a:prstGeom>
+          <a:noFill/>
+          <a:ln/>
+        </p:spPr>
+        <p:txBody>
+          <a:bodyPr wrap="square" lIns="0" tIns="0" rIns="0" bIns="0" rtlCol="0" anchor="t"/>
+          <a:lstStyle/>
+          <a:p>
+            <a:pPr marL="0" indent="0" algn="l">
+              <a:buNone/>
+            </a:pPr>
+            <a:r>
+              <a:rPr lang="en-US" sz="900" b="1" dirty="0">
+                <a:solidFill>
+                  <a:srgbClr val="FFFFFF"/>
+                </a:solidFill>
+                <a:latin typeface="Arial" pitchFamily="34" charset="0"/>
+                <a:ea typeface="Arial" pitchFamily="34" charset="-122"/>
+                <a:cs typeface="Arial" pitchFamily="34" charset="-120"/>
+              </a:rPr>
+              <a:t>1</a:t>
+            </a:r>
+            <a:endParaRPr lang="en-US" sz="900" dirty="0"/>
+          </a:p>
+        </p:txBody>
+      </p:sp>
+      <p:sp>
+        <p:nvSpPr>
+          <p:cNvPr id="8" name="Text 6"/>
+          <p:cNvSpPr/>
+          <p:nvPr/>
+        </p:nvSpPr>
+        <p:spPr>
+          <a:xfrm>
+            <a:off x="974675" y="1072902"/>
+            <a:ext cx="1186657" cy="152400"/>
+          </a:xfrm>
+          <a:prstGeom prst="rect">
+            <a:avLst/>
+          </a:prstGeom>
+          <a:noFill/>
+          <a:ln/>
+        </p:spPr>
+        <p:txBody>
+          <a:bodyPr wrap="square" lIns="0" tIns="0" rIns="0" bIns="0" rtlCol="0" anchor="t"/>
+          <a:lstStyle/>
+          <a:p>
+            <a:pPr marL="0" indent="0" algn="l">
+              <a:buNone/>
+            </a:pPr>
+            <a:r>
+              <a:rPr lang="en-US" sz="1050" b="1" dirty="0">
+                <a:solidFill>
+                  <a:srgbClr val="FFFFFF"/>
+                </a:solidFill>
+                <a:latin typeface="Arial" pitchFamily="34" charset="0"/>
+                <a:ea typeface="Arial" pitchFamily="34" charset="-122"/>
+                <a:cs typeface="Arial" pitchFamily="34" charset="-120"/>
+              </a:rPr>
+              <a:t>Forced Delegation</a:t>
+            </a:r>
+            <a:endParaRPr lang="en-US" sz="1050" dirty="0"/>
+          </a:p>
+        </p:txBody>
+      </p:sp>
+      <p:sp>
+        <p:nvSpPr>
+          <p:cNvPr id="9" name="Text 7"/>
+          <p:cNvSpPr/>
+          <p:nvPr/>
+        </p:nvSpPr>
+        <p:spPr>
+          <a:xfrm>
+            <a:off x="669875" y="1314152"/>
+            <a:ext cx="2346900" cy="420588"/>
+          </a:xfrm>
+          <a:prstGeom prst="rect">
+            <a:avLst/>
+          </a:prstGeom>
+          <a:noFill/>
+          <a:ln/>
+        </p:spPr>
+        <p:txBody>
+          <a:bodyPr wrap="square" lIns="0" tIns="0" rIns="0" bIns="0" rtlCol="0" anchor="t"/>
+          <a:lstStyle/>
+          <a:p>
+            <a:pPr marL="0" indent="0" algn="l">
+              <a:lnSpc>
+                <a:spcPts val="1105"/>
+              </a:lnSpc>
+              <a:buNone/>
+            </a:pPr>
+            <a:r>
+              <a:rPr lang="en-US" sz="850" dirty="0">
+                <a:solidFill>
+                  <a:srgbClr val="AAAAAA"/>
+                </a:solidFill>
+                <a:latin typeface="Arial" pitchFamily="34" charset="0"/>
+                <a:ea typeface="Arial" pitchFamily="34" charset="-122"/>
+                <a:cs typeface="Arial" pitchFamily="34" charset="-120"/>
+              </a:rPr>
+              <a:t>Orchestrator has no code access, forcing proper task decomposition and strategic thinking over quick fixes.</a:t>
+            </a:r>
+            <a:endParaRPr lang="en-US" sz="850" dirty="0"/>
+          </a:p>
+        </p:txBody>
+      </p:sp>
+      <p:sp>
+        <p:nvSpPr>
+          <p:cNvPr id="10" name="Text 8"/>
+          <p:cNvSpPr/>
+          <p:nvPr/>
+        </p:nvSpPr>
+        <p:spPr>
+          <a:xfrm>
+            <a:off x="3259634" y="898327"/>
+            <a:ext cx="2624584" cy="972889"/>
+          </a:xfrm>
+          <a:prstGeom prst="roundRect">
+            <a:avLst>
+              <a:gd name="adj" fmla="val 7832"/>
+            </a:avLst>
+          </a:prstGeom>
+          <a:solidFill>
+            <a:srgbClr val="FFFFFF">
+              <a:alpha val="3000"/>
+            </a:srgbClr>
+          </a:solidFill>
+          <a:ln w="9525">
+            <a:solidFill>
+              <a:srgbClr val="FFFFFF"/>
+            </a:solidFill>
+          </a:ln>
+        </p:spPr>
+        <p:txBody>
+          <a:bodyPr wrap="square" rtlCol="0" anchor="ctr"/>
+          <a:lstStyle/>
+          <a:p>
+            <a:pPr marL="0" indent="0">
+              <a:buNone/>
+            </a:pPr>
+            <a:endParaRPr lang="en-US" dirty="0"/>
+          </a:p>
+        </p:txBody>
+      </p:sp>
+      <p:sp>
+        <p:nvSpPr>
+          <p:cNvPr id="11" name="Text 9"/>
+          <p:cNvSpPr/>
+          <p:nvPr/>
+        </p:nvSpPr>
+        <p:spPr>
+          <a:xfrm>
+            <a:off x="3421559" y="1034802"/>
+            <a:ext cx="228600" cy="228600"/>
+          </a:xfrm>
+          <a:prstGeom prst="roundRect">
+            <a:avLst>
+              <a:gd name="adj" fmla="val 22222"/>
+            </a:avLst>
+          </a:prstGeom>
+          <a:solidFill>
+            <a:srgbClr val="B165FB"/>
+          </a:solidFill>
+          <a:ln/>
+        </p:spPr>
+        <p:txBody>
+          <a:bodyPr wrap="square" rtlCol="0" anchor="ctr"/>
+          <a:lstStyle/>
+          <a:p>
+            <a:pPr marL="0" indent="0">
+              <a:buNone/>
+            </a:pPr>
+            <a:endParaRPr lang="en-US" dirty="0"/>
+          </a:p>
+        </p:txBody>
+      </p:sp>
+      <p:sp>
+        <p:nvSpPr>
+          <p:cNvPr id="12" name="Text 10"/>
+          <p:cNvSpPr/>
+          <p:nvPr/>
+        </p:nvSpPr>
+        <p:spPr>
+          <a:xfrm>
+            <a:off x="3504009" y="1082427"/>
+            <a:ext cx="64972" cy="133350"/>
+          </a:xfrm>
+          <a:prstGeom prst="rect">
+            <a:avLst/>
+          </a:prstGeom>
+          <a:noFill/>
+          <a:ln/>
+        </p:spPr>
+        <p:txBody>
+          <a:bodyPr wrap="square" lIns="0" tIns="0" rIns="0" bIns="0" rtlCol="0" anchor="t"/>
+          <a:lstStyle/>
+          <a:p>
+            <a:pPr marL="0" indent="0" algn="l">
+              <a:buNone/>
+            </a:pPr>
+            <a:r>
+              <a:rPr lang="en-US" sz="900" b="1" dirty="0">
+                <a:solidFill>
+                  <a:srgbClr val="FFFFFF"/>
+                </a:solidFill>
+                <a:latin typeface="Arial" pitchFamily="34" charset="0"/>
+                <a:ea typeface="Arial" pitchFamily="34" charset="-122"/>
+                <a:cs typeface="Arial" pitchFamily="34" charset="-120"/>
+              </a:rPr>
+              <a:t>2</a:t>
+            </a:r>
+            <a:endParaRPr lang="en-US" sz="900" dirty="0"/>
+          </a:p>
+        </p:txBody>
+      </p:sp>
+      <p:sp>
+        <p:nvSpPr>
+          <p:cNvPr id="13" name="Text 11"/>
+          <p:cNvSpPr/>
+          <p:nvPr/>
+        </p:nvSpPr>
+        <p:spPr>
+          <a:xfrm>
+            <a:off x="3726359" y="1072902"/>
+            <a:ext cx="1247227" cy="152400"/>
+          </a:xfrm>
+          <a:prstGeom prst="rect">
+            <a:avLst/>
+          </a:prstGeom>
+          <a:noFill/>
+          <a:ln/>
+        </p:spPr>
+        <p:txBody>
+          <a:bodyPr wrap="square" lIns="0" tIns="0" rIns="0" bIns="0" rtlCol="0" anchor="t"/>
+          <a:lstStyle/>
+          <a:p>
+            <a:pPr marL="0" indent="0" algn="l">
+              <a:buNone/>
+            </a:pPr>
+            <a:r>
+              <a:rPr lang="en-US" sz="1050" b="1" dirty="0">
+                <a:solidFill>
+                  <a:srgbClr val="FFFFFF"/>
+                </a:solidFill>
+                <a:latin typeface="Arial" pitchFamily="34" charset="0"/>
+                <a:ea typeface="Arial" pitchFamily="34" charset="-122"/>
+                <a:cs typeface="Arial" pitchFamily="34" charset="-120"/>
+              </a:rPr>
+              <a:t>Pydantic Validation</a:t>
+            </a:r>
+            <a:endParaRPr lang="en-US" sz="1050" dirty="0"/>
+          </a:p>
+        </p:txBody>
+      </p:sp>
+      <p:sp>
+        <p:nvSpPr>
+          <p:cNvPr id="14" name="Text 12"/>
+          <p:cNvSpPr/>
+          <p:nvPr/>
+        </p:nvSpPr>
+        <p:spPr>
+          <a:xfrm>
+            <a:off x="3421559" y="1314152"/>
+            <a:ext cx="2346749" cy="420588"/>
+          </a:xfrm>
+          <a:prstGeom prst="rect">
+            <a:avLst/>
+          </a:prstGeom>
+          <a:noFill/>
+          <a:ln/>
+        </p:spPr>
+        <p:txBody>
+          <a:bodyPr wrap="square" lIns="0" tIns="0" rIns="0" bIns="0" rtlCol="0" anchor="t"/>
+          <a:lstStyle/>
+          <a:p>
+            <a:pPr marL="0" indent="0" algn="l">
+              <a:lnSpc>
+                <a:spcPts val="1105"/>
+              </a:lnSpc>
+              <a:buNone/>
+            </a:pPr>
+            <a:r>
+              <a:rPr lang="en-US" sz="850" dirty="0">
+                <a:solidFill>
+                  <a:srgbClr val="AAAAAA"/>
+                </a:solidFill>
+                <a:latin typeface="Arial" pitchFamily="34" charset="0"/>
+                <a:ea typeface="Arial" pitchFamily="34" charset="-122"/>
+                <a:cs typeface="Arial" pitchFamily="34" charset="-120"/>
+              </a:rPr>
+              <a:t>Every action is a Pydantic model with extra="forbid". LLM cannot pass unexpected fields.</a:t>
+            </a:r>
+            <a:endParaRPr lang="en-US" sz="850" dirty="0"/>
+          </a:p>
+        </p:txBody>
+      </p:sp>
+      <p:sp>
+        <p:nvSpPr>
+          <p:cNvPr id="15" name="Text 13"/>
+          <p:cNvSpPr/>
+          <p:nvPr/>
+        </p:nvSpPr>
+        <p:spPr>
+          <a:xfrm>
+            <a:off x="6011168" y="898327"/>
+            <a:ext cx="2624733" cy="972889"/>
+          </a:xfrm>
+          <a:prstGeom prst="roundRect">
+            <a:avLst>
+              <a:gd name="adj" fmla="val 7832"/>
+            </a:avLst>
+          </a:prstGeom>
+          <a:solidFill>
+            <a:srgbClr val="FFFFFF">
+              <a:alpha val="3000"/>
+            </a:srgbClr>
+          </a:solidFill>
+          <a:ln w="9525">
+            <a:solidFill>
+              <a:srgbClr val="FFFFFF"/>
+            </a:solidFill>
+          </a:ln>
+        </p:spPr>
+        <p:txBody>
+          <a:bodyPr wrap="square" rtlCol="0" anchor="ctr"/>
+          <a:lstStyle/>
+          <a:p>
+            <a:pPr marL="0" indent="0">
+              <a:buNone/>
+            </a:pPr>
+            <a:endParaRPr lang="en-US" dirty="0"/>
+          </a:p>
+        </p:txBody>
+      </p:sp>
+      <p:sp>
+        <p:nvSpPr>
+          <p:cNvPr id="16" name="Text 14"/>
+          <p:cNvSpPr/>
+          <p:nvPr/>
+        </p:nvSpPr>
+        <p:spPr>
+          <a:xfrm>
+            <a:off x="6173093" y="1034802"/>
+            <a:ext cx="228600" cy="228600"/>
+          </a:xfrm>
+          <a:prstGeom prst="roundRect">
+            <a:avLst>
+              <a:gd name="adj" fmla="val 22222"/>
+            </a:avLst>
+          </a:prstGeom>
+          <a:solidFill>
+            <a:srgbClr val="B165FB"/>
+          </a:solidFill>
+          <a:ln/>
+        </p:spPr>
+        <p:txBody>
+          <a:bodyPr wrap="square" rtlCol="0" anchor="ctr"/>
+          <a:lstStyle/>
+          <a:p>
+            <a:pPr marL="0" indent="0">
+              <a:buNone/>
+            </a:pPr>
+            <a:endParaRPr lang="en-US" dirty="0"/>
+          </a:p>
+        </p:txBody>
+      </p:sp>
+      <p:sp>
+        <p:nvSpPr>
+          <p:cNvPr id="17" name="Text 15"/>
+          <p:cNvSpPr/>
+          <p:nvPr/>
+        </p:nvSpPr>
+        <p:spPr>
+          <a:xfrm>
+            <a:off x="6255544" y="1082427"/>
+            <a:ext cx="64972" cy="133350"/>
+          </a:xfrm>
+          <a:prstGeom prst="rect">
+            <a:avLst/>
+          </a:prstGeom>
+          <a:noFill/>
+          <a:ln/>
+        </p:spPr>
+        <p:txBody>
+          <a:bodyPr wrap="square" lIns="0" tIns="0" rIns="0" bIns="0" rtlCol="0" anchor="t"/>
+          <a:lstStyle/>
+          <a:p>
+            <a:pPr marL="0" indent="0" algn="l">
+              <a:buNone/>
+            </a:pPr>
+            <a:r>
+              <a:rPr lang="en-US" sz="900" b="1" dirty="0">
+                <a:solidFill>
+                  <a:srgbClr val="FFFFFF"/>
+                </a:solidFill>
+                <a:latin typeface="Arial" pitchFamily="34" charset="0"/>
+                <a:ea typeface="Arial" pitchFamily="34" charset="-122"/>
+                <a:cs typeface="Arial" pitchFamily="34" charset="-120"/>
+              </a:rPr>
+              <a:t>3</a:t>
+            </a:r>
+            <a:endParaRPr lang="en-US" sz="900" dirty="0"/>
+          </a:p>
+        </p:txBody>
+      </p:sp>
+      <p:sp>
+        <p:nvSpPr>
+          <p:cNvPr id="18" name="Text 16"/>
+          <p:cNvSpPr/>
+          <p:nvPr/>
+        </p:nvSpPr>
+        <p:spPr>
+          <a:xfrm>
+            <a:off x="6477893" y="1072902"/>
+            <a:ext cx="1126239" cy="152400"/>
+          </a:xfrm>
+          <a:prstGeom prst="rect">
+            <a:avLst/>
+          </a:prstGeom>
+          <a:noFill/>
+          <a:ln/>
+        </p:spPr>
+        <p:txBody>
+          <a:bodyPr wrap="square" lIns="0" tIns="0" rIns="0" bIns="0" rtlCol="0" anchor="t"/>
+          <a:lstStyle/>
+          <a:p>
+            <a:pPr marL="0" indent="0" algn="l">
+              <a:buNone/>
+            </a:pPr>
+            <a:r>
+              <a:rPr lang="en-US" sz="1050" b="1" dirty="0">
+                <a:solidFill>
+                  <a:srgbClr val="FFFFFF"/>
+                </a:solidFill>
+                <a:latin typeface="Arial" pitchFamily="34" charset="0"/>
+                <a:ea typeface="Arial" pitchFamily="34" charset="-122"/>
+                <a:cs typeface="Arial" pitchFamily="34" charset="-120"/>
+              </a:rPr>
+              <a:t>YAML inside XML</a:t>
+            </a:r>
+            <a:endParaRPr lang="en-US" sz="1050" dirty="0"/>
+          </a:p>
+        </p:txBody>
+      </p:sp>
+      <p:sp>
+        <p:nvSpPr>
+          <p:cNvPr id="19" name="Text 17"/>
+          <p:cNvSpPr/>
+          <p:nvPr/>
+        </p:nvSpPr>
+        <p:spPr>
+          <a:xfrm>
+            <a:off x="6173093" y="1314152"/>
+            <a:ext cx="2346900" cy="420588"/>
+          </a:xfrm>
+          <a:prstGeom prst="rect">
+            <a:avLst/>
+          </a:prstGeom>
+          <a:noFill/>
+          <a:ln/>
+        </p:spPr>
+        <p:txBody>
+          <a:bodyPr wrap="square" lIns="0" tIns="0" rIns="0" bIns="0" rtlCol="0" anchor="t"/>
+          <a:lstStyle/>
+          <a:p>
+            <a:pPr marL="0" indent="0" algn="l">
+              <a:lnSpc>
+                <a:spcPts val="1105"/>
+              </a:lnSpc>
+              <a:buNone/>
+            </a:pPr>
+            <a:r>
+              <a:rPr lang="en-US" sz="850" dirty="0">
+                <a:solidFill>
+                  <a:srgbClr val="AAAAAA"/>
+                </a:solidFill>
+                <a:latin typeface="Arial" pitchFamily="34" charset="0"/>
+                <a:ea typeface="Arial" pitchFamily="34" charset="-122"/>
+                <a:cs typeface="Arial" pitchFamily="34" charset="-120"/>
+              </a:rPr>
+              <a:t>XML tags define action boundaries, YAML provides structured data. Clean parsing with clear semantics.</a:t>
+            </a:r>
+            <a:endParaRPr lang="en-US" sz="850" dirty="0"/>
+          </a:p>
+        </p:txBody>
+      </p:sp>
+      <p:sp>
+        <p:nvSpPr>
+          <p:cNvPr id="20" name="Text 18"/>
+          <p:cNvSpPr/>
+          <p:nvPr/>
+        </p:nvSpPr>
+        <p:spPr>
+          <a:xfrm>
+            <a:off x="507950" y="1972717"/>
+            <a:ext cx="2624733" cy="972889"/>
+          </a:xfrm>
+          <a:prstGeom prst="roundRect">
+            <a:avLst>
+              <a:gd name="adj" fmla="val 7832"/>
+            </a:avLst>
+          </a:prstGeom>
+          <a:solidFill>
+            <a:srgbClr val="FFFFFF">
+              <a:alpha val="3000"/>
+            </a:srgbClr>
+          </a:solidFill>
+          <a:ln w="9525">
+            <a:solidFill>
+              <a:srgbClr val="FFFFFF"/>
+            </a:solidFill>
+          </a:ln>
+        </p:spPr>
+        <p:txBody>
+          <a:bodyPr wrap="square" rtlCol="0" anchor="ctr"/>
+          <a:lstStyle/>
+          <a:p>
+            <a:pPr marL="0" indent="0">
+              <a:buNone/>
+            </a:pPr>
+            <a:endParaRPr lang="en-US" dirty="0"/>
+          </a:p>
+        </p:txBody>
+      </p:sp>
+      <p:sp>
+        <p:nvSpPr>
+          <p:cNvPr id="21" name="Text 19"/>
+          <p:cNvSpPr/>
+          <p:nvPr/>
+        </p:nvSpPr>
+        <p:spPr>
+          <a:xfrm>
+            <a:off x="669875" y="2109192"/>
+            <a:ext cx="228600" cy="228600"/>
+          </a:xfrm>
+          <a:prstGeom prst="roundRect">
+            <a:avLst>
+              <a:gd name="adj" fmla="val 22222"/>
+            </a:avLst>
+          </a:prstGeom>
+          <a:solidFill>
+            <a:srgbClr val="B165FB"/>
+          </a:solidFill>
+          <a:ln/>
+        </p:spPr>
+        <p:txBody>
+          <a:bodyPr wrap="square" rtlCol="0" anchor="ctr"/>
+          <a:lstStyle/>
+          <a:p>
+            <a:pPr marL="0" indent="0">
+              <a:buNone/>
+            </a:pPr>
+            <a:endParaRPr lang="en-US" dirty="0"/>
+          </a:p>
+        </p:txBody>
+      </p:sp>
+      <p:sp>
+        <p:nvSpPr>
+          <p:cNvPr id="22" name="Text 20"/>
+          <p:cNvSpPr/>
+          <p:nvPr/>
+        </p:nvSpPr>
+        <p:spPr>
+          <a:xfrm>
+            <a:off x="752326" y="2156817"/>
+            <a:ext cx="64972" cy="133350"/>
+          </a:xfrm>
+          <a:prstGeom prst="rect">
+            <a:avLst/>
+          </a:prstGeom>
+          <a:noFill/>
+          <a:ln/>
+        </p:spPr>
+        <p:txBody>
+          <a:bodyPr wrap="square" lIns="0" tIns="0" rIns="0" bIns="0" rtlCol="0" anchor="t"/>
+          <a:lstStyle/>
+          <a:p>
+            <a:pPr marL="0" indent="0" algn="l">
+              <a:buNone/>
+            </a:pPr>
+            <a:r>
+              <a:rPr lang="en-US" sz="900" b="1" dirty="0">
+                <a:solidFill>
+                  <a:srgbClr val="FFFFFF"/>
+                </a:solidFill>
+                <a:latin typeface="Arial" pitchFamily="34" charset="0"/>
+                <a:ea typeface="Arial" pitchFamily="34" charset="-122"/>
+                <a:cs typeface="Arial" pitchFamily="34" charset="-120"/>
+              </a:rPr>
+              <a:t>4</a:t>
+            </a:r>
+            <a:endParaRPr lang="en-US" sz="900" dirty="0"/>
+          </a:p>
+        </p:txBody>
+      </p:sp>
+      <p:sp>
+        <p:nvSpPr>
+          <p:cNvPr id="23" name="Text 21"/>
+          <p:cNvSpPr/>
+          <p:nvPr/>
+        </p:nvSpPr>
+        <p:spPr>
+          <a:xfrm>
+            <a:off x="974675" y="2147292"/>
+            <a:ext cx="1300207" cy="152400"/>
+          </a:xfrm>
+          <a:prstGeom prst="rect">
+            <a:avLst/>
+          </a:prstGeom>
+          <a:noFill/>
+          <a:ln/>
+        </p:spPr>
+        <p:txBody>
+          <a:bodyPr wrap="square" lIns="0" tIns="0" rIns="0" bIns="0" rtlCol="0" anchor="t"/>
+          <a:lstStyle/>
+          <a:p>
+            <a:pPr marL="0" indent="0" algn="l">
+              <a:buNone/>
+            </a:pPr>
+            <a:r>
+              <a:rPr lang="en-US" sz="1050" b="1" dirty="0">
+                <a:solidFill>
+                  <a:srgbClr val="FFFFFF"/>
+                </a:solidFill>
+                <a:latin typeface="Arial" pitchFamily="34" charset="0"/>
+                <a:ea typeface="Arial" pitchFamily="34" charset="-122"/>
+                <a:cs typeface="Arial" pitchFamily="34" charset="-120"/>
+              </a:rPr>
+              <a:t>Middleware Pipeline</a:t>
+            </a:r>
+            <a:endParaRPr lang="en-US" sz="1050" dirty="0"/>
+          </a:p>
+        </p:txBody>
+      </p:sp>
+      <p:sp>
+        <p:nvSpPr>
+          <p:cNvPr id="24" name="Text 22"/>
+          <p:cNvSpPr/>
+          <p:nvPr/>
+        </p:nvSpPr>
+        <p:spPr>
+          <a:xfrm>
+            <a:off x="669875" y="2388543"/>
+            <a:ext cx="2346900" cy="420588"/>
+          </a:xfrm>
+          <a:prstGeom prst="rect">
+            <a:avLst/>
+          </a:prstGeom>
+          <a:noFill/>
+          <a:ln/>
+        </p:spPr>
+        <p:txBody>
+          <a:bodyPr wrap="square" lIns="0" tIns="0" rIns="0" bIns="0" rtlCol="0" anchor="t"/>
+          <a:lstStyle/>
+          <a:p>
+            <a:pPr marL="0" indent="0" algn="l">
+              <a:lnSpc>
+                <a:spcPts val="1105"/>
+              </a:lnSpc>
+              <a:buNone/>
+            </a:pPr>
+            <a:r>
+              <a:rPr lang="en-US" sz="850" dirty="0">
+                <a:solidFill>
+                  <a:srgbClr val="AAAAAA"/>
+                </a:solidFill>
+                <a:latin typeface="Arial" pitchFamily="34" charset="0"/>
+                <a:ea typeface="Arial" pitchFamily="34" charset="-122"/>
+                <a:cs typeface="Arial" pitchFamily="34" charset="-120"/>
+              </a:rPr>
+              <a:t>Cross-cutting concerns separated from action logic via before/after hooks with chain unwinding.</a:t>
+            </a:r>
+            <a:endParaRPr lang="en-US" sz="850" dirty="0"/>
+          </a:p>
+        </p:txBody>
+      </p:sp>
+      <p:sp>
+        <p:nvSpPr>
+          <p:cNvPr id="25" name="Text 23"/>
+          <p:cNvSpPr/>
+          <p:nvPr/>
+        </p:nvSpPr>
+        <p:spPr>
+          <a:xfrm>
+            <a:off x="3259634" y="1972717"/>
+            <a:ext cx="2624584" cy="972889"/>
+          </a:xfrm>
+          <a:prstGeom prst="roundRect">
+            <a:avLst>
+              <a:gd name="adj" fmla="val 7832"/>
+            </a:avLst>
+          </a:prstGeom>
+          <a:solidFill>
+            <a:srgbClr val="FFFFFF">
+              <a:alpha val="3000"/>
+            </a:srgbClr>
+          </a:solidFill>
+          <a:ln w="9525">
+            <a:solidFill>
+              <a:srgbClr val="FFFFFF"/>
+            </a:solidFill>
+          </a:ln>
+        </p:spPr>
+        <p:txBody>
+          <a:bodyPr wrap="square" rtlCol="0" anchor="ctr"/>
+          <a:lstStyle/>
+          <a:p>
+            <a:pPr marL="0" indent="0">
+              <a:buNone/>
+            </a:pPr>
+            <a:endParaRPr lang="en-US" dirty="0"/>
+          </a:p>
+        </p:txBody>
+      </p:sp>
+      <p:sp>
+        <p:nvSpPr>
+          <p:cNvPr id="26" name="Text 24"/>
+          <p:cNvSpPr/>
+          <p:nvPr/>
+        </p:nvSpPr>
+        <p:spPr>
+          <a:xfrm>
+            <a:off x="3421559" y="2109192"/>
+            <a:ext cx="228600" cy="228600"/>
+          </a:xfrm>
+          <a:prstGeom prst="roundRect">
+            <a:avLst>
+              <a:gd name="adj" fmla="val 22222"/>
+            </a:avLst>
+          </a:prstGeom>
+          <a:solidFill>
+            <a:srgbClr val="B165FB"/>
+          </a:solidFill>
+          <a:ln/>
+        </p:spPr>
+        <p:txBody>
+          <a:bodyPr wrap="square" rtlCol="0" anchor="ctr"/>
+          <a:lstStyle/>
+          <a:p>
+            <a:pPr marL="0" indent="0">
+              <a:buNone/>
+            </a:pPr>
+            <a:endParaRPr lang="en-US" dirty="0"/>
+          </a:p>
+        </p:txBody>
+      </p:sp>
+      <p:sp>
+        <p:nvSpPr>
+          <p:cNvPr id="27" name="Text 25"/>
+          <p:cNvSpPr/>
+          <p:nvPr/>
+        </p:nvSpPr>
+        <p:spPr>
+          <a:xfrm>
+            <a:off x="3504009" y="2156817"/>
+            <a:ext cx="64972" cy="133350"/>
+          </a:xfrm>
+          <a:prstGeom prst="rect">
+            <a:avLst/>
+          </a:prstGeom>
+          <a:noFill/>
+          <a:ln/>
+        </p:spPr>
+        <p:txBody>
+          <a:bodyPr wrap="square" lIns="0" tIns="0" rIns="0" bIns="0" rtlCol="0" anchor="t"/>
+          <a:lstStyle/>
+          <a:p>
+            <a:pPr marL="0" indent="0" algn="l">
+              <a:buNone/>
+            </a:pPr>
+            <a:r>
+              <a:rPr lang="en-US" sz="900" b="1" dirty="0">
+                <a:solidFill>
+                  <a:srgbClr val="FFFFFF"/>
+                </a:solidFill>
+                <a:latin typeface="Arial" pitchFamily="34" charset="0"/>
+                <a:ea typeface="Arial" pitchFamily="34" charset="-122"/>
+                <a:cs typeface="Arial" pitchFamily="34" charset="-120"/>
+              </a:rPr>
+              <a:t>5</a:t>
+            </a:r>
+            <a:endParaRPr lang="en-US" sz="900" dirty="0"/>
+          </a:p>
+        </p:txBody>
+      </p:sp>
+      <p:sp>
+        <p:nvSpPr>
+          <p:cNvPr id="28" name="Text 26"/>
+          <p:cNvSpPr/>
+          <p:nvPr/>
+        </p:nvSpPr>
+        <p:spPr>
+          <a:xfrm>
+            <a:off x="3726359" y="2147292"/>
+            <a:ext cx="1264685" cy="152400"/>
+          </a:xfrm>
+          <a:prstGeom prst="rect">
+            <a:avLst/>
+          </a:prstGeom>
+          <a:noFill/>
+          <a:ln/>
+        </p:spPr>
+        <p:txBody>
+          <a:bodyPr wrap="square" lIns="0" tIns="0" rIns="0" bIns="0" rtlCol="0" anchor="t"/>
+          <a:lstStyle/>
+          <a:p>
+            <a:pPr marL="0" indent="0" algn="l">
+              <a:buNone/>
+            </a:pPr>
+            <a:r>
+              <a:rPr lang="en-US" sz="1050" b="1" dirty="0">
+                <a:solidFill>
+                  <a:srgbClr val="FFFFFF"/>
+                </a:solidFill>
+                <a:latin typeface="Arial" pitchFamily="34" charset="0"/>
+                <a:ea typeface="Arial" pitchFamily="34" charset="-122"/>
+                <a:cs typeface="Arial" pitchFamily="34" charset="-120"/>
+              </a:rPr>
+              <a:t>Error Accumulation</a:t>
+            </a:r>
+            <a:endParaRPr lang="en-US" sz="1050" dirty="0"/>
+          </a:p>
+        </p:txBody>
+      </p:sp>
+      <p:sp>
+        <p:nvSpPr>
+          <p:cNvPr id="29" name="Text 27"/>
+          <p:cNvSpPr/>
+          <p:nvPr/>
+        </p:nvSpPr>
+        <p:spPr>
+          <a:xfrm>
+            <a:off x="3421559" y="2388543"/>
+            <a:ext cx="2346749" cy="420588"/>
+          </a:xfrm>
+          <a:prstGeom prst="rect">
+            <a:avLst/>
+          </a:prstGeom>
+          <a:noFill/>
+          <a:ln/>
+        </p:spPr>
+        <p:txBody>
+          <a:bodyPr wrap="square" lIns="0" tIns="0" rIns="0" bIns="0" rtlCol="0" anchor="t"/>
+          <a:lstStyle/>
+          <a:p>
+            <a:pPr marL="0" indent="0" algn="l">
+              <a:lnSpc>
+                <a:spcPts val="1105"/>
+              </a:lnSpc>
+              <a:buNone/>
+            </a:pPr>
+            <a:r>
+              <a:rPr lang="en-US" sz="850" dirty="0">
+                <a:solidFill>
+                  <a:srgbClr val="AAAAAA"/>
+                </a:solidFill>
+                <a:latin typeface="Arial" pitchFamily="34" charset="0"/>
+                <a:ea typeface="Arial" pitchFamily="34" charset="-122"/>
+                <a:cs typeface="Arial" pitchFamily="34" charset="-120"/>
+              </a:rPr>
+              <a:t>Errors are OR-accumulated, not short-circuited. Parse and execution errors collected for the agent.</a:t>
+            </a:r>
+            <a:endParaRPr lang="en-US" sz="850" dirty="0"/>
+          </a:p>
+        </p:txBody>
+      </p:sp>
+      <p:sp>
+        <p:nvSpPr>
+          <p:cNvPr id="30" name="Text 28"/>
+          <p:cNvSpPr/>
+          <p:nvPr/>
+        </p:nvSpPr>
+        <p:spPr>
+          <a:xfrm>
+            <a:off x="6011168" y="1972717"/>
+            <a:ext cx="2624733" cy="972889"/>
+          </a:xfrm>
+          <a:prstGeom prst="roundRect">
+            <a:avLst>
+              <a:gd name="adj" fmla="val 7832"/>
+            </a:avLst>
+          </a:prstGeom>
+          <a:solidFill>
+            <a:srgbClr val="FFFFFF">
+              <a:alpha val="3000"/>
+            </a:srgbClr>
+          </a:solidFill>
+          <a:ln w="9525">
+            <a:solidFill>
+              <a:srgbClr val="FFFFFF"/>
+            </a:solidFill>
+          </a:ln>
+        </p:spPr>
+        <p:txBody>
+          <a:bodyPr wrap="square" rtlCol="0" anchor="ctr"/>
+          <a:lstStyle/>
+          <a:p>
+            <a:pPr marL="0" indent="0">
+              <a:buNone/>
+            </a:pPr>
+            <a:endParaRPr lang="en-US" dirty="0"/>
+          </a:p>
+        </p:txBody>
+      </p:sp>
+      <p:sp>
+        <p:nvSpPr>
+          <p:cNvPr id="31" name="Text 29"/>
+          <p:cNvSpPr/>
+          <p:nvPr/>
+        </p:nvSpPr>
+        <p:spPr>
+          <a:xfrm>
+            <a:off x="6173093" y="2109192"/>
+            <a:ext cx="228600" cy="228600"/>
+          </a:xfrm>
+          <a:prstGeom prst="roundRect">
+            <a:avLst>
+              <a:gd name="adj" fmla="val 22222"/>
+            </a:avLst>
+          </a:prstGeom>
+          <a:solidFill>
+            <a:srgbClr val="B165FB"/>
+          </a:solidFill>
+          <a:ln/>
+        </p:spPr>
+        <p:txBody>
+          <a:bodyPr wrap="square" rtlCol="0" anchor="ctr"/>
+          <a:lstStyle/>
+          <a:p>
+            <a:pPr marL="0" indent="0">
+              <a:buNone/>
+            </a:pPr>
+            <a:endParaRPr lang="en-US" dirty="0"/>
+          </a:p>
+        </p:txBody>
+      </p:sp>
+      <p:sp>
+        <p:nvSpPr>
+          <p:cNvPr id="32" name="Text 30"/>
+          <p:cNvSpPr/>
+          <p:nvPr/>
+        </p:nvSpPr>
+        <p:spPr>
+          <a:xfrm>
+            <a:off x="6255544" y="2156817"/>
+            <a:ext cx="64972" cy="133350"/>
+          </a:xfrm>
+          <a:prstGeom prst="rect">
+            <a:avLst/>
+          </a:prstGeom>
+          <a:noFill/>
+          <a:ln/>
+        </p:spPr>
+        <p:txBody>
+          <a:bodyPr wrap="square" lIns="0" tIns="0" rIns="0" bIns="0" rtlCol="0" anchor="t"/>
+          <a:lstStyle/>
+          <a:p>
+            <a:pPr marL="0" indent="0" algn="l">
+              <a:buNone/>
+            </a:pPr>
+            <a:r>
+              <a:rPr lang="en-US" sz="900" b="1" dirty="0">
+                <a:solidFill>
+                  <a:srgbClr val="FFFFFF"/>
+                </a:solidFill>
+                <a:latin typeface="Arial" pitchFamily="34" charset="0"/>
+                <a:ea typeface="Arial" pitchFamily="34" charset="-122"/>
+                <a:cs typeface="Arial" pitchFamily="34" charset="-120"/>
+              </a:rPr>
+              <a:t>6</a:t>
+            </a:r>
+            <a:endParaRPr lang="en-US" sz="900" dirty="0"/>
+          </a:p>
+        </p:txBody>
+      </p:sp>
+      <p:sp>
+        <p:nvSpPr>
+          <p:cNvPr id="33" name="Text 31"/>
+          <p:cNvSpPr/>
+          <p:nvPr/>
+        </p:nvSpPr>
+        <p:spPr>
+          <a:xfrm>
+            <a:off x="6477893" y="2147292"/>
+            <a:ext cx="1239485" cy="152400"/>
+          </a:xfrm>
+          <a:prstGeom prst="rect">
+            <a:avLst/>
+          </a:prstGeom>
+          <a:noFill/>
+          <a:ln/>
+        </p:spPr>
+        <p:txBody>
+          <a:bodyPr wrap="square" lIns="0" tIns="0" rIns="0" bIns="0" rtlCol="0" anchor="t"/>
+          <a:lstStyle/>
+          <a:p>
+            <a:pPr marL="0" indent="0" algn="l">
+              <a:buNone/>
+            </a:pPr>
+            <a:r>
+              <a:rPr lang="en-US" sz="1050" b="1" dirty="0">
+                <a:solidFill>
+                  <a:srgbClr val="FFFFFF"/>
+                </a:solidFill>
+                <a:latin typeface="Arial" pitchFamily="34" charset="0"/>
+                <a:ea typeface="Arial" pitchFamily="34" charset="-122"/>
+                <a:cs typeface="Arial" pitchFamily="34" charset="-120"/>
+              </a:rPr>
+              <a:t>Built-in Verification</a:t>
+            </a:r>
+            <a:endParaRPr lang="en-US" sz="1050" dirty="0"/>
+          </a:p>
+        </p:txBody>
+      </p:sp>
+      <p:sp>
+        <p:nvSpPr>
+          <p:cNvPr id="34" name="Text 32"/>
+          <p:cNvSpPr/>
+          <p:nvPr/>
+        </p:nvSpPr>
+        <p:spPr>
+          <a:xfrm>
+            <a:off x="6173093" y="2388543"/>
+            <a:ext cx="2346900" cy="420588"/>
+          </a:xfrm>
+          <a:prstGeom prst="rect">
+            <a:avLst/>
+          </a:prstGeom>
+          <a:noFill/>
+          <a:ln/>
+        </p:spPr>
+        <p:txBody>
+          <a:bodyPr wrap="square" lIns="0" tIns="0" rIns="0" bIns="0" rtlCol="0" anchor="t"/>
+          <a:lstStyle/>
+          <a:p>
+            <a:pPr marL="0" indent="0" algn="l">
+              <a:lnSpc>
+                <a:spcPts val="1105"/>
+              </a:lnSpc>
+              <a:buNone/>
+            </a:pPr>
+            <a:r>
+              <a:rPr lang="en-US" sz="850" dirty="0">
+                <a:solidFill>
+                  <a:srgbClr val="AAAAAA"/>
+                </a:solidFill>
+                <a:latin typeface="Arial" pitchFamily="34" charset="0"/>
+                <a:ea typeface="Arial" pitchFamily="34" charset="-122"/>
+                <a:cs typeface="Arial" pitchFamily="34" charset="-120"/>
+              </a:rPr>
+              <a:t>Explorer agents verify all implementations. Test execution built into the workflow, not an afterthought.</a:t>
             </a:r>
             <a:endParaRPr lang="en-US" sz="850" dirty="0"/>
           </a:p>

--- a/ai-code-assistant-course.pptx
+++ b/ai-code-assistant-course.pptx
@@ -2811,7 +2811,7 @@
                 <a:ea typeface="Arial" pitchFamily="34" charset="-122"/>
                 <a:cs typeface="Arial" pitchFamily="34" charset="-120"/>
               </a:rPr>
-              <a:t>What Are Deep Agents?</a:t>
+              <a:t>What Are Multi-Agents Architecture?</a:t>
             </a:r>
             <a:endParaRPr lang="en-US" sz="2600" dirty="0"/>
           </a:p>
